--- a/exports/pptx/lessons/middle-module-11-multiplication-near-base/day-09-speed-and-project.pptx
+++ b/exports/pptx/lessons/middle-module-11-multiplication-near-base/day-09-speed-and-project.pptx
@@ -18,9 +18,10 @@
     <p:sldId id="266" r:id="rId12"/>
     <p:sldId id="267" r:id="rId13"/>
     <p:sldId id="268" r:id="rId14"/>
+    <p:sldId id="269" r:id="rId15"/>
   </p:sldIdLst>
   <p:notesMasterIdLst>
-    <p:notesMasterId r:id="rId15"/>
+    <p:notesMasterId r:id="rId16"/>
   </p:notesMasterIdLst>
   <p:sldSz cx="9144000" cy="5143500"/>
   <p:notesSz cx="5143500" cy="9144000"/>
@@ -890,6 +891,94 @@
             <a:fld id="{F7021451-1387-4CA6-816F-3879F97B5CBC}" type="slidenum">
               <a:rPr lang="en-US"/>
               <a:t>13</a:t>
+            </a:fld>
+            <a:endParaRPr lang="en-US"/>
+          </a:p>
+        </p:txBody>
+      </p:sp>
+    </p:spTree>
+    <p:extLst>
+      <p:ext uri="{BB962C8B-B14F-4D97-AF65-F5344CB8AC3E}">
+        <p14:creationId xmlns:p14="http://schemas.microsoft.com/office/powerpoint/2010/main" val="1024086991"/>
+      </p:ext>
+    </p:extLst>
+  </p:cSld>
+  <p:clrMapOvr>
+    <a:masterClrMapping/>
+  </p:clrMapOvr>
+</p:notes>
+</file>
+
+<file path=ppt/notesSlides/notesSlide14.xml><?xml version="1.0" encoding="utf-8"?>
+<p:notes xmlns:a="http://schemas.openxmlformats.org/drawingml/2006/main" xmlns:r="http://schemas.openxmlformats.org/officeDocument/2006/relationships" xmlns:p="http://schemas.openxmlformats.org/presentationml/2006/main">
+  <p:cSld>
+    <p:spTree>
+      <p:nvGrpSpPr>
+        <p:cNvPr id="1" name=""/>
+        <p:cNvGrpSpPr/>
+        <p:nvPr/>
+      </p:nvGrpSpPr>
+      <p:grpSpPr>
+        <a:xfrm>
+          <a:off x="0" y="0"/>
+          <a:ext cx="0" cy="0"/>
+          <a:chOff x="0" y="0"/>
+          <a:chExt cx="0" cy="0"/>
+        </a:xfrm>
+      </p:grpSpPr>
+      <p:sp>
+        <p:nvSpPr>
+          <p:cNvPr id="2" name="Slide Image Placeholder 1"/>
+          <p:cNvSpPr>
+            <a:spLocks noGrp="1" noRot="1" noChangeAspect="1"/>
+          </p:cNvSpPr>
+          <p:nvPr>
+            <p:ph type="sldImg"/>
+          </p:nvPr>
+        </p:nvSpPr>
+        <p:spPr/>
+      </p:sp>
+      <p:sp>
+        <p:nvSpPr>
+          <p:cNvPr id="3" name="Notes Placeholder 2"/>
+          <p:cNvSpPr>
+            <a:spLocks noGrp="1"/>
+          </p:cNvSpPr>
+          <p:nvPr>
+            <p:ph type="body" idx="1"/>
+          </p:nvPr>
+        </p:nvSpPr>
+        <p:spPr/>
+        <p:txBody>
+          <a:bodyPr/>
+          <a:lstStyle/>
+          <a:p>
+            <a:r>
+              <a:rPr lang="en-US" dirty="0"/>
+              <a:t/>
+            </a:r>
+            <a:endParaRPr lang="en-US" dirty="0"/>
+          </a:p>
+        </p:txBody>
+      </p:sp>
+      <p:sp>
+        <p:nvSpPr>
+          <p:cNvPr id="4" name="Slide Number Placeholder 3"/>
+          <p:cNvSpPr>
+            <a:spLocks noGrp="1"/>
+          </p:cNvSpPr>
+          <p:nvPr>
+            <p:ph type="sldNum" sz="quarter" idx="10"/>
+          </p:nvPr>
+        </p:nvSpPr>
+        <p:spPr/>
+        <p:txBody>
+          <a:bodyPr/>
+          <a:lstStyle/>
+          <a:p>
+            <a:fld id="{F7021451-1387-4CA6-816F-3879F97B5CBC}" type="slidenum">
+              <a:rPr lang="en-US"/>
+              <a:t>14</a:t>
             </a:fld>
             <a:endParaRPr lang="en-US"/>
           </a:p>
@@ -2189,102 +2278,6 @@
         </p:nvSpPr>
         <p:spPr>
           <a:xfrm>
-            <a:off x="406301" y="1223963"/>
-            <a:ext cx="8498026" cy="274290"/>
-          </a:xfrm>
-          <a:prstGeom prst="rect">
-            <a:avLst/>
-          </a:prstGeom>
-          <a:noFill/>
-          <a:ln/>
-        </p:spPr>
-        <p:txBody>
-          <a:bodyPr wrap="square" lIns="0" tIns="0" rIns="0" bIns="0" rtlCol="0" anchor="t"/>
-          <a:lstStyle/>
-          <a:p>
-            <a:pPr algn="l" indent="0" marL="0">
-              <a:lnSpc>
-                <a:spcPts val="2160"/>
-              </a:lnSpc>
-              <a:spcBef>
-                <a:spcPts val="600"/>
-              </a:spcBef>
-              <a:spcAft>
-                <a:spcPts val="800"/>
-              </a:spcAft>
-              <a:buNone/>
-            </a:pPr>
-            <a:r>
-              <a:rPr lang="en-US" sz="1800" b="1" dirty="0">
-                <a:solidFill>
-                  <a:srgbClr val="FE4447"/>
-                </a:solidFill>
-                <a:latin typeface="Georgia" pitchFamily="34" charset="0"/>
-                <a:ea typeface="Georgia" pitchFamily="34" charset="-122"/>
-                <a:cs typeface="Georgia" pitchFamily="34" charset="-120"/>
-              </a:rPr>
-              <a:t>Learning objective</a:t>
-            </a:r>
-            <a:endParaRPr lang="en-US" sz="1800" dirty="0"/>
-          </a:p>
-        </p:txBody>
-      </p:sp>
-      <p:sp>
-        <p:nvSpPr>
-          <p:cNvPr id="6" name="Text 4"/>
-          <p:cNvSpPr/>
-          <p:nvPr/>
-        </p:nvSpPr>
-        <p:spPr>
-          <a:xfrm>
-            <a:off x="406301" y="1637854"/>
-            <a:ext cx="8498026" cy="426541"/>
-          </a:xfrm>
-          <a:prstGeom prst="rect">
-            <a:avLst/>
-          </a:prstGeom>
-          <a:noFill/>
-          <a:ln/>
-        </p:spPr>
-        <p:txBody>
-          <a:bodyPr wrap="square" lIns="0" tIns="0" rIns="0" bIns="0" rtlCol="0" anchor="t"/>
-          <a:lstStyle/>
-          <a:p>
-            <a:pPr algn="l" indent="0" marL="0">
-              <a:lnSpc>
-                <a:spcPts val="1680"/>
-              </a:lnSpc>
-              <a:spcBef>
-                <a:spcPts val="300"/>
-              </a:spcBef>
-              <a:spcAft>
-                <a:spcPts val="300"/>
-              </a:spcAft>
-              <a:buNone/>
-            </a:pPr>
-            <a:r>
-              <a:rPr lang="en-US" sz="1200" dirty="0">
-                <a:solidFill>
-                  <a:srgbClr val="1C2833"/>
-                </a:solidFill>
-                <a:latin typeface="Arial" pitchFamily="34" charset="0"/>
-                <a:ea typeface="Arial" pitchFamily="34" charset="-122"/>
-                <a:cs typeface="Arial" pitchFamily="34" charset="-120"/>
-              </a:rPr>
-              <a:t>By the end of this lesson, students will demonstrate sub-10-second mental Nikhilam multiplication on Day 1's baseline problem (and similar) AND will have a project plan/draft ready for Day 10's showcase.</a:t>
-            </a:r>
-            <a:endParaRPr lang="en-US" sz="1200" dirty="0"/>
-          </a:p>
-        </p:txBody>
-      </p:sp>
-      <p:sp>
-        <p:nvSpPr>
-          <p:cNvPr id="7" name="Text 5"/>
-          <p:cNvSpPr/>
-          <p:nvPr/>
-        </p:nvSpPr>
-        <p:spPr>
-          <a:xfrm>
             <a:off x="406301" y="4434929"/>
             <a:ext cx="8498026" cy="213271"/>
           </a:xfrm>
@@ -2429,7 +2422,7 @@
                 <a:ea typeface="Georgia" pitchFamily="34" charset="-122"/>
                 <a:cs typeface="Georgia" pitchFamily="34" charset="-120"/>
               </a:rPr>
-              <a:t>Homework</a:t>
+              <a:t>Student-facing content</a:t>
             </a:r>
             <a:endParaRPr lang="en-US" sz="1800" dirty="0"/>
           </a:p>
@@ -2443,8 +2436,61 @@
         </p:nvSpPr>
         <p:spPr>
           <a:xfrm>
-            <a:off x="406301" y="870942"/>
-            <a:ext cx="8498026" cy="426541"/>
+            <a:off x="406301" y="883593"/>
+            <a:ext cx="8331398" cy="2976563"/>
+          </a:xfrm>
+          <a:prstGeom prst="rect">
+            <a:avLst/>
+          </a:prstGeom>
+          <a:solidFill>
+            <a:srgbClr val="F4F8F9"/>
+          </a:solidFill>
+          <a:ln/>
+        </p:spPr>
+        <p:txBody>
+          <a:bodyPr wrap="square" rtlCol="0" anchor="ctr"/>
+          <a:lstStyle/>
+          <a:p>
+            <a:pPr indent="0" marL="0">
+              <a:buNone/>
+            </a:pPr>
+            <a:endParaRPr lang="en-US" dirty="0"/>
+          </a:p>
+        </p:txBody>
+      </p:sp>
+      <p:sp>
+        <p:nvSpPr>
+          <p:cNvPr id="5" name="Shape 3"/>
+          <p:cNvSpPr/>
+          <p:nvPr/>
+        </p:nvSpPr>
+        <p:spPr>
+          <a:xfrm>
+            <a:off x="434876" y="883593"/>
+            <a:ext cx="0" cy="2976563"/>
+          </a:xfrm>
+          <a:prstGeom prst="line">
+            <a:avLst/>
+          </a:prstGeom>
+          <a:noFill/>
+          <a:ln w="57150">
+            <a:solidFill>
+              <a:srgbClr val="FE4447"/>
+            </a:solidFill>
+            <a:prstDash val="solid"/>
+          </a:ln>
+        </p:spPr>
+      </p:sp>
+      <p:sp>
+        <p:nvSpPr>
+          <p:cNvPr id="6" name="Text 4"/>
+          <p:cNvSpPr/>
+          <p:nvPr/>
+        </p:nvSpPr>
+        <p:spPr>
+          <a:xfrm>
+            <a:off x="692051" y="1074093"/>
+            <a:ext cx="7973389" cy="230981"/>
           </a:xfrm>
           <a:prstGeom prst="rect">
             <a:avLst/>
@@ -2458,7 +2504,7 @@
           <a:p>
             <a:pPr algn="l" indent="0" marL="0">
               <a:lnSpc>
-                <a:spcPts val="1680"/>
+                <a:spcPts val="1820"/>
               </a:lnSpc>
               <a:spcBef>
                 <a:spcPts val="300"/>
@@ -2469,23 +2515,520 @@
               <a:buNone/>
             </a:pPr>
             <a:r>
-              <a:rPr lang="en-US" sz="1200" dirty="0">
-                <a:solidFill>
-                  <a:srgbClr val="1C2833"/>
-                </a:solidFill>
-                <a:latin typeface="Arial" pitchFamily="34" charset="0"/>
-                <a:ea typeface="Arial" pitchFamily="34" charset="-122"/>
-                <a:cs typeface="Arial" pitchFamily="34" charset="-120"/>
-              </a:rPr>
-              <a:t>– Finish project plan at home. – Practise your featured example until you can present it without notes. – 5 mental Nikhilam problems a day, every day, even after this module ends.</a:t>
-            </a:r>
-            <a:endParaRPr lang="en-US" sz="1200" dirty="0"/>
-          </a:p>
-        </p:txBody>
-      </p:sp>
-      <p:sp>
-        <p:nvSpPr>
-          <p:cNvPr id="5" name="Text 3"/>
+              <a:rPr lang="en-US" sz="1300" b="1" i="1" dirty="0">
+                <a:solidFill>
+                  <a:srgbClr val="1C2833"/>
+                </a:solidFill>
+                <a:latin typeface="Georgia" pitchFamily="34" charset="0"/>
+                <a:ea typeface="Georgia" pitchFamily="34" charset="-122"/>
+                <a:cs typeface="Georgia" pitchFamily="34" charset="-120"/>
+              </a:rPr>
+              <a:t>Day 1 retest:</a:t>
+            </a:r>
+            <a:endParaRPr lang="en-US" sz="1300" dirty="0"/>
+          </a:p>
+        </p:txBody>
+      </p:sp>
+      <p:sp>
+        <p:nvSpPr>
+          <p:cNvPr id="7" name="Text 5"/>
+          <p:cNvSpPr/>
+          <p:nvPr/>
+        </p:nvSpPr>
+        <p:spPr>
+          <a:xfrm>
+            <a:off x="692051" y="1343174"/>
+            <a:ext cx="7973389" cy="481012"/>
+          </a:xfrm>
+          <a:prstGeom prst="rect">
+            <a:avLst/>
+          </a:prstGeom>
+          <a:noFill/>
+          <a:ln/>
+        </p:spPr>
+        <p:txBody>
+          <a:bodyPr wrap="square" lIns="0" tIns="0" rIns="0" bIns="0" rtlCol="0" anchor="t"/>
+          <a:lstStyle/>
+          <a:p>
+            <a:pPr algn="l" indent="0" marL="0">
+              <a:lnSpc>
+                <a:spcPts val="1820"/>
+              </a:lnSpc>
+              <a:spcBef>
+                <a:spcPts val="300"/>
+              </a:spcBef>
+              <a:spcAft>
+                <a:spcPts val="300"/>
+              </a:spcAft>
+              <a:buNone/>
+            </a:pPr>
+            <a:r>
+              <a:rPr lang="en-US" sz="1300" dirty="0">
+                <a:solidFill>
+                  <a:srgbClr val="1C2833"/>
+                </a:solidFill>
+                <a:latin typeface="Georgia" pitchFamily="34" charset="0"/>
+                <a:ea typeface="Georgia" pitchFamily="34" charset="-122"/>
+                <a:cs typeface="Georgia" pitchFamily="34" charset="-120"/>
+              </a:rPr>
+              <a:t>My time on </a:t>
+            </a:r>
+            <a:pPr algn="l" indent="0" marL="0">
+              <a:lnSpc>
+                <a:spcPts val="1820"/>
+              </a:lnSpc>
+              <a:spcBef>
+                <a:spcPts val="300"/>
+              </a:spcBef>
+              <a:spcAft>
+                <a:spcPts val="300"/>
+              </a:spcAft>
+              <a:buNone/>
+            </a:pPr>
+            <a:r>
+              <a:rPr lang="en-US" sz="1300" i="1" dirty="0">
+                <a:solidFill>
+                  <a:srgbClr val="1C2833"/>
+                </a:solidFill>
+                <a:latin typeface="Georgia" pitchFamily="34" charset="0"/>
+                <a:ea typeface="Georgia" pitchFamily="34" charset="-122"/>
+                <a:cs typeface="Georgia" pitchFamily="34" charset="-120"/>
+              </a:rPr>
+              <a:t>97 × 96</a:t>
+            </a:r>
+            <a:pPr algn="l" indent="0" marL="0">
+              <a:lnSpc>
+                <a:spcPts val="1820"/>
+              </a:lnSpc>
+              <a:spcBef>
+                <a:spcPts val="300"/>
+              </a:spcBef>
+              <a:spcAft>
+                <a:spcPts val="300"/>
+              </a:spcAft>
+              <a:buNone/>
+            </a:pPr>
+            <a:r>
+              <a:rPr lang="en-US" sz="1300" dirty="0">
+                <a:solidFill>
+                  <a:srgbClr val="1C2833"/>
+                </a:solidFill>
+                <a:latin typeface="Georgia" pitchFamily="34" charset="0"/>
+                <a:ea typeface="Georgia" pitchFamily="34" charset="-122"/>
+                <a:cs typeface="Georgia" pitchFamily="34" charset="-120"/>
+              </a:rPr>
+              <a:t> (Day 1, long multiplication): ____ seconds My time on </a:t>
+            </a:r>
+            <a:pPr algn="l" indent="0" marL="0">
+              <a:lnSpc>
+                <a:spcPts val="1820"/>
+              </a:lnSpc>
+              <a:spcBef>
+                <a:spcPts val="300"/>
+              </a:spcBef>
+              <a:spcAft>
+                <a:spcPts val="300"/>
+              </a:spcAft>
+              <a:buNone/>
+            </a:pPr>
+            <a:r>
+              <a:rPr lang="en-US" sz="1300" i="1" dirty="0">
+                <a:solidFill>
+                  <a:srgbClr val="1C2833"/>
+                </a:solidFill>
+                <a:latin typeface="Georgia" pitchFamily="34" charset="0"/>
+                <a:ea typeface="Georgia" pitchFamily="34" charset="-122"/>
+                <a:cs typeface="Georgia" pitchFamily="34" charset="-120"/>
+              </a:rPr>
+              <a:t>97 × 96</a:t>
+            </a:r>
+            <a:pPr algn="l" indent="0" marL="0">
+              <a:lnSpc>
+                <a:spcPts val="1820"/>
+              </a:lnSpc>
+              <a:spcBef>
+                <a:spcPts val="300"/>
+              </a:spcBef>
+              <a:spcAft>
+                <a:spcPts val="300"/>
+              </a:spcAft>
+              <a:buNone/>
+            </a:pPr>
+            <a:r>
+              <a:rPr lang="en-US" sz="1300" dirty="0">
+                <a:solidFill>
+                  <a:srgbClr val="1C2833"/>
+                </a:solidFill>
+                <a:latin typeface="Georgia" pitchFamily="34" charset="0"/>
+                <a:ea typeface="Georgia" pitchFamily="34" charset="-122"/>
+                <a:cs typeface="Georgia" pitchFamily="34" charset="-120"/>
+              </a:rPr>
+              <a:t> (Day 9, Nikhilam): ____ seconds </a:t>
+            </a:r>
+            <a:pPr algn="l" indent="0" marL="0">
+              <a:lnSpc>
+                <a:spcPts val="1820"/>
+              </a:lnSpc>
+              <a:spcBef>
+                <a:spcPts val="300"/>
+              </a:spcBef>
+              <a:spcAft>
+                <a:spcPts val="300"/>
+              </a:spcAft>
+              <a:buNone/>
+            </a:pPr>
+            <a:r>
+              <a:rPr lang="en-US" sz="1300" b="1" i="1" dirty="0">
+                <a:solidFill>
+                  <a:srgbClr val="1C2833"/>
+                </a:solidFill>
+                <a:latin typeface="Georgia" pitchFamily="34" charset="0"/>
+                <a:ea typeface="Georgia" pitchFamily="34" charset="-122"/>
+                <a:cs typeface="Georgia" pitchFamily="34" charset="-120"/>
+              </a:rPr>
+              <a:t>My speedup:</a:t>
+            </a:r>
+            <a:pPr algn="l" indent="0" marL="0">
+              <a:lnSpc>
+                <a:spcPts val="1820"/>
+              </a:lnSpc>
+              <a:spcBef>
+                <a:spcPts val="300"/>
+              </a:spcBef>
+              <a:spcAft>
+                <a:spcPts val="300"/>
+              </a:spcAft>
+              <a:buNone/>
+            </a:pPr>
+            <a:r>
+              <a:rPr lang="en-US" sz="1300" dirty="0">
+                <a:solidFill>
+                  <a:srgbClr val="1C2833"/>
+                </a:solidFill>
+                <a:latin typeface="Georgia" pitchFamily="34" charset="0"/>
+                <a:ea typeface="Georgia" pitchFamily="34" charset="-122"/>
+                <a:cs typeface="Georgia" pitchFamily="34" charset="-120"/>
+              </a:rPr>
+              <a:t> ____×</a:t>
+            </a:r>
+            <a:endParaRPr lang="en-US" sz="1300" dirty="0"/>
+          </a:p>
+        </p:txBody>
+      </p:sp>
+      <p:sp>
+        <p:nvSpPr>
+          <p:cNvPr id="8" name="Text 6"/>
+          <p:cNvSpPr/>
+          <p:nvPr/>
+        </p:nvSpPr>
+        <p:spPr>
+          <a:xfrm>
+            <a:off x="692051" y="1862286"/>
+            <a:ext cx="7973389" cy="461963"/>
+          </a:xfrm>
+          <a:prstGeom prst="rect">
+            <a:avLst/>
+          </a:prstGeom>
+          <a:noFill/>
+          <a:ln/>
+        </p:spPr>
+        <p:txBody>
+          <a:bodyPr wrap="square" lIns="0" tIns="0" rIns="0" bIns="0" rtlCol="0" anchor="t"/>
+          <a:lstStyle/>
+          <a:p>
+            <a:pPr algn="l" indent="0" marL="0">
+              <a:lnSpc>
+                <a:spcPts val="1820"/>
+              </a:lnSpc>
+              <a:spcBef>
+                <a:spcPts val="300"/>
+              </a:spcBef>
+              <a:spcAft>
+                <a:spcPts val="300"/>
+              </a:spcAft>
+              <a:buNone/>
+            </a:pPr>
+            <a:r>
+              <a:rPr lang="en-US" sz="1300" b="1" i="1" dirty="0">
+                <a:solidFill>
+                  <a:srgbClr val="1C2833"/>
+                </a:solidFill>
+                <a:latin typeface="Georgia" pitchFamily="34" charset="0"/>
+                <a:ea typeface="Georgia" pitchFamily="34" charset="-122"/>
+                <a:cs typeface="Georgia" pitchFamily="34" charset="-120"/>
+              </a:rPr>
+              <a:t>Sprint scoring:</a:t>
+            </a:r>
+            <a:pPr algn="l" indent="0" marL="0">
+              <a:lnSpc>
+                <a:spcPts val="1820"/>
+              </a:lnSpc>
+              <a:spcBef>
+                <a:spcPts val="300"/>
+              </a:spcBef>
+              <a:spcAft>
+                <a:spcPts val="300"/>
+              </a:spcAft>
+              <a:buNone/>
+            </a:pPr>
+            <a:r>
+              <a:rPr lang="en-US" sz="1300" dirty="0">
+                <a:solidFill>
+                  <a:srgbClr val="1C2833"/>
+                </a:solidFill>
+                <a:latin typeface="Georgia" pitchFamily="34" charset="0"/>
+                <a:ea typeface="Georgia" pitchFamily="34" charset="-122"/>
+                <a:cs typeface="Georgia" pitchFamily="34" charset="-120"/>
+              </a:rPr>
+              <a:t> 10 problems in 3 minutes. Each correct = 1 point. Each wrong with right method = 0.5 (you knew the method). Each wrong with wrong method choice = 0.</a:t>
+            </a:r>
+            <a:endParaRPr lang="en-US" sz="1300" dirty="0"/>
+          </a:p>
+        </p:txBody>
+      </p:sp>
+      <p:sp>
+        <p:nvSpPr>
+          <p:cNvPr id="9" name="Text 7"/>
+          <p:cNvSpPr/>
+          <p:nvPr/>
+        </p:nvSpPr>
+        <p:spPr>
+          <a:xfrm>
+            <a:off x="692051" y="2362349"/>
+            <a:ext cx="7973389" cy="230981"/>
+          </a:xfrm>
+          <a:prstGeom prst="rect">
+            <a:avLst/>
+          </a:prstGeom>
+          <a:noFill/>
+          <a:ln/>
+        </p:spPr>
+        <p:txBody>
+          <a:bodyPr wrap="square" lIns="0" tIns="0" rIns="0" bIns="0" rtlCol="0" anchor="t"/>
+          <a:lstStyle/>
+          <a:p>
+            <a:pPr algn="l" indent="0" marL="0">
+              <a:lnSpc>
+                <a:spcPts val="1820"/>
+              </a:lnSpc>
+              <a:spcBef>
+                <a:spcPts val="300"/>
+              </a:spcBef>
+              <a:spcAft>
+                <a:spcPts val="300"/>
+              </a:spcAft>
+              <a:buNone/>
+            </a:pPr>
+            <a:r>
+              <a:rPr lang="en-US" sz="1300" b="1" i="1" dirty="0">
+                <a:solidFill>
+                  <a:srgbClr val="1C2833"/>
+                </a:solidFill>
+                <a:latin typeface="Georgia" pitchFamily="34" charset="0"/>
+                <a:ea typeface="Georgia" pitchFamily="34" charset="-122"/>
+                <a:cs typeface="Georgia" pitchFamily="34" charset="-120"/>
+              </a:rPr>
+              <a:t>Project plan (fill in):</a:t>
+            </a:r>
+            <a:endParaRPr lang="en-US" sz="1300" dirty="0"/>
+          </a:p>
+        </p:txBody>
+      </p:sp>
+      <p:sp>
+        <p:nvSpPr>
+          <p:cNvPr id="10" name="Text 8"/>
+          <p:cNvSpPr/>
+          <p:nvPr/>
+        </p:nvSpPr>
+        <p:spPr>
+          <a:xfrm>
+            <a:off x="692051" y="2631430"/>
+            <a:ext cx="7973389" cy="230981"/>
+          </a:xfrm>
+          <a:prstGeom prst="rect">
+            <a:avLst/>
+          </a:prstGeom>
+          <a:noFill/>
+          <a:ln/>
+        </p:spPr>
+        <p:txBody>
+          <a:bodyPr wrap="square" lIns="0" tIns="0" rIns="0" bIns="0" rtlCol="0" anchor="t"/>
+          <a:lstStyle/>
+          <a:p>
+            <a:pPr algn="l" indent="0" marL="0">
+              <a:lnSpc>
+                <a:spcPts val="1820"/>
+              </a:lnSpc>
+              <a:spcBef>
+                <a:spcPts val="300"/>
+              </a:spcBef>
+              <a:spcAft>
+                <a:spcPts val="300"/>
+              </a:spcAft>
+              <a:buNone/>
+            </a:pPr>
+            <a:r>
+              <a:rPr lang="en-US" sz="1300" i="1" dirty="0">
+                <a:solidFill>
+                  <a:srgbClr val="1C2833"/>
+                </a:solidFill>
+                <a:latin typeface="Georgia" pitchFamily="34" charset="0"/>
+                <a:ea typeface="Georgia" pitchFamily="34" charset="-122"/>
+                <a:cs typeface="Georgia" pitchFamily="34" charset="-120"/>
+              </a:rPr>
+              <a:t>Format: ______________</a:t>
+            </a:r>
+            <a:endParaRPr lang="en-US" sz="1300" dirty="0"/>
+          </a:p>
+        </p:txBody>
+      </p:sp>
+      <p:sp>
+        <p:nvSpPr>
+          <p:cNvPr id="11" name="Text 9"/>
+          <p:cNvSpPr/>
+          <p:nvPr/>
+        </p:nvSpPr>
+        <p:spPr>
+          <a:xfrm>
+            <a:off x="692051" y="2900511"/>
+            <a:ext cx="7973389" cy="230981"/>
+          </a:xfrm>
+          <a:prstGeom prst="rect">
+            <a:avLst/>
+          </a:prstGeom>
+          <a:noFill/>
+          <a:ln/>
+        </p:spPr>
+        <p:txBody>
+          <a:bodyPr wrap="square" lIns="0" tIns="0" rIns="0" bIns="0" rtlCol="0" anchor="t"/>
+          <a:lstStyle/>
+          <a:p>
+            <a:pPr algn="l" indent="0" marL="0">
+              <a:lnSpc>
+                <a:spcPts val="1820"/>
+              </a:lnSpc>
+              <a:spcBef>
+                <a:spcPts val="300"/>
+              </a:spcBef>
+              <a:spcAft>
+                <a:spcPts val="300"/>
+              </a:spcAft>
+              <a:buNone/>
+            </a:pPr>
+            <a:r>
+              <a:rPr lang="en-US" sz="1300" i="1" dirty="0">
+                <a:solidFill>
+                  <a:srgbClr val="1C2833"/>
+                </a:solidFill>
+                <a:latin typeface="Georgia" pitchFamily="34" charset="0"/>
+                <a:ea typeface="Georgia" pitchFamily="34" charset="-122"/>
+                <a:cs typeface="Georgia" pitchFamily="34" charset="-120"/>
+              </a:rPr>
+              <a:t>Featured example: ____________</a:t>
+            </a:r>
+            <a:endParaRPr lang="en-US" sz="1300" dirty="0"/>
+          </a:p>
+        </p:txBody>
+      </p:sp>
+      <p:sp>
+        <p:nvSpPr>
+          <p:cNvPr id="12" name="Text 10"/>
+          <p:cNvSpPr/>
+          <p:nvPr/>
+        </p:nvSpPr>
+        <p:spPr>
+          <a:xfrm>
+            <a:off x="692051" y="3169593"/>
+            <a:ext cx="7973389" cy="230981"/>
+          </a:xfrm>
+          <a:prstGeom prst="rect">
+            <a:avLst/>
+          </a:prstGeom>
+          <a:noFill/>
+          <a:ln/>
+        </p:spPr>
+        <p:txBody>
+          <a:bodyPr wrap="square" lIns="0" tIns="0" rIns="0" bIns="0" rtlCol="0" anchor="t"/>
+          <a:lstStyle/>
+          <a:p>
+            <a:pPr algn="l" indent="0" marL="0">
+              <a:lnSpc>
+                <a:spcPts val="1820"/>
+              </a:lnSpc>
+              <a:spcBef>
+                <a:spcPts val="300"/>
+              </a:spcBef>
+              <a:spcAft>
+                <a:spcPts val="300"/>
+              </a:spcAft>
+              <a:buNone/>
+            </a:pPr>
+            <a:r>
+              <a:rPr lang="en-US" sz="1300" i="1" dirty="0">
+                <a:solidFill>
+                  <a:srgbClr val="1C2833"/>
+                </a:solidFill>
+                <a:latin typeface="Georgia" pitchFamily="34" charset="0"/>
+                <a:ea typeface="Georgia" pitchFamily="34" charset="-122"/>
+                <a:cs typeface="Georgia" pitchFamily="34" charset="-120"/>
+              </a:rPr>
+              <a:t>Materials: ________________</a:t>
+            </a:r>
+            <a:endParaRPr lang="en-US" sz="1300" dirty="0"/>
+          </a:p>
+        </p:txBody>
+      </p:sp>
+      <p:sp>
+        <p:nvSpPr>
+          <p:cNvPr id="13" name="Text 11"/>
+          <p:cNvSpPr/>
+          <p:nvPr/>
+        </p:nvSpPr>
+        <p:spPr>
+          <a:xfrm>
+            <a:off x="692051" y="3438674"/>
+            <a:ext cx="7973389" cy="230981"/>
+          </a:xfrm>
+          <a:prstGeom prst="rect">
+            <a:avLst/>
+          </a:prstGeom>
+          <a:noFill/>
+          <a:ln/>
+        </p:spPr>
+        <p:txBody>
+          <a:bodyPr wrap="square" lIns="0" tIns="0" rIns="0" bIns="0" rtlCol="0" anchor="t"/>
+          <a:lstStyle/>
+          <a:p>
+            <a:pPr algn="l" indent="0" marL="0">
+              <a:lnSpc>
+                <a:spcPts val="1820"/>
+              </a:lnSpc>
+              <a:spcBef>
+                <a:spcPts val="300"/>
+              </a:spcBef>
+              <a:spcAft>
+                <a:spcPts val="300"/>
+              </a:spcAft>
+              <a:buNone/>
+            </a:pPr>
+            <a:r>
+              <a:rPr lang="en-US" sz="1300" i="1" dirty="0">
+                <a:solidFill>
+                  <a:srgbClr val="1C2833"/>
+                </a:solidFill>
+                <a:latin typeface="Georgia" pitchFamily="34" charset="0"/>
+                <a:ea typeface="Georgia" pitchFamily="34" charset="-122"/>
+                <a:cs typeface="Georgia" pitchFamily="34" charset="-120"/>
+              </a:rPr>
+              <a:t>Partner / role split: ______________</a:t>
+            </a:r>
+            <a:endParaRPr lang="en-US" sz="1300" dirty="0"/>
+          </a:p>
+        </p:txBody>
+      </p:sp>
+      <p:sp>
+        <p:nvSpPr>
+          <p:cNvPr id="14" name="Text 12"/>
           <p:cNvSpPr/>
           <p:nvPr/>
         </p:nvSpPr>
@@ -2635,7 +3178,7 @@
                 <a:ea typeface="Georgia" pitchFamily="34" charset="-122"/>
                 <a:cs typeface="Georgia" pitchFamily="34" charset="-120"/>
               </a:rPr>
-              <a:t>Differentiation</a:t>
+              <a:t>Homework</a:t>
             </a:r>
             <a:endParaRPr lang="en-US" sz="1800" dirty="0"/>
           </a:p>
@@ -2650,7 +3193,7 @@
         <p:spPr>
           <a:xfrm>
             <a:off x="634901" y="883593"/>
-            <a:ext cx="8102798" cy="525661"/>
+            <a:ext cx="8102798" cy="769441"/>
           </a:xfrm>
           <a:prstGeom prst="rect">
             <a:avLst/>
@@ -2673,26 +3216,6 @@
               <a:buChar char="•"/>
             </a:pPr>
             <a:r>
-              <a:rPr lang="en-US" sz="1200" b="1" dirty="0">
-                <a:solidFill>
-                  <a:srgbClr val="1C2833"/>
-                </a:solidFill>
-                <a:latin typeface="Arial" pitchFamily="34" charset="0"/>
-                <a:ea typeface="Arial" pitchFamily="34" charset="-122"/>
-                <a:cs typeface="Arial" pitchFamily="34" charset="-120"/>
-              </a:rPr>
-              <a:t>Tier up:</a:t>
-            </a:r>
-            <a:pPr algn="l" indent="0" marL="0">
-              <a:lnSpc>
-                <a:spcPts val="1620"/>
-              </a:lnSpc>
-              <a:spcAft>
-                <a:spcPts val="300"/>
-              </a:spcAft>
-              <a:buNone/>
-            </a:pPr>
-            <a:r>
               <a:rPr lang="en-US" sz="1200" dirty="0">
                 <a:solidFill>
                   <a:srgbClr val="1C2833"/>
@@ -2701,7 +3224,7 @@
                 <a:ea typeface="Arial" pitchFamily="34" charset="-122"/>
                 <a:cs typeface="Arial" pitchFamily="34" charset="-120"/>
               </a:rPr>
-              <a:t> Sprint round of 20 problems in 3 minutes (full speed).</a:t>
+              <a:t>Finish project plan at home.</a:t>
             </a:r>
             <a:endParaRPr lang="en-US" sz="1200" dirty="0"/>
           </a:p>
@@ -2717,24 +3240,28 @@
               <a:buChar char="•"/>
             </a:pPr>
             <a:r>
-              <a:rPr lang="en-US" sz="1200" b="1" dirty="0">
-                <a:solidFill>
-                  <a:srgbClr val="1C2833"/>
-                </a:solidFill>
-                <a:latin typeface="Arial" pitchFamily="34" charset="0"/>
-                <a:ea typeface="Arial" pitchFamily="34" charset="-122"/>
-                <a:cs typeface="Arial" pitchFamily="34" charset="-120"/>
-              </a:rPr>
-              <a:t>Tier down:</a:t>
-            </a:r>
-            <a:pPr algn="l" indent="0" marL="0">
+              <a:rPr lang="en-US" sz="1200" dirty="0">
+                <a:solidFill>
+                  <a:srgbClr val="1C2833"/>
+                </a:solidFill>
+                <a:latin typeface="Arial" pitchFamily="34" charset="0"/>
+                <a:ea typeface="Arial" pitchFamily="34" charset="-122"/>
+                <a:cs typeface="Arial" pitchFamily="34" charset="-120"/>
+              </a:rPr>
+              <a:t>Practise your featured example until you can present it without notes.</a:t>
+            </a:r>
+            <a:endParaRPr lang="en-US" sz="1200" dirty="0"/>
+          </a:p>
+          <a:p>
+            <a:pPr algn="l" marL="342900" indent="-342900">
               <a:lnSpc>
                 <a:spcPts val="1620"/>
               </a:lnSpc>
               <a:spcAft>
                 <a:spcPts val="300"/>
               </a:spcAft>
-              <a:buNone/>
+              <a:buSzPct val="100000"/>
+              <a:buChar char="•"/>
             </a:pPr>
             <a:r>
               <a:rPr lang="en-US" sz="1200" dirty="0">
@@ -2745,7 +3272,7 @@
                 <a:ea typeface="Arial" pitchFamily="34" charset="-122"/>
                 <a:cs typeface="Arial" pitchFamily="34" charset="-120"/>
               </a:rPr>
-              <a:t> Sprint sheet with 5 problems in 3 minutes (slower pace, still timed).</a:t>
+              <a:t>5 mental Nikhilam problems a day, every day, even after this module ends.</a:t>
             </a:r>
             <a:endParaRPr lang="en-US" sz="1200" dirty="0"/>
           </a:p>
@@ -2903,7 +3430,7 @@
                 <a:ea typeface="Georgia" pitchFamily="34" charset="-122"/>
                 <a:cs typeface="Georgia" pitchFamily="34" charset="-120"/>
               </a:rPr>
-              <a:t>Teacher notes</a:t>
+              <a:t>Differentiation</a:t>
             </a:r>
             <a:endParaRPr lang="en-US" sz="1800" dirty="0"/>
           </a:p>
@@ -2917,8 +3444,8 @@
         </p:nvSpPr>
         <p:spPr>
           <a:xfrm>
-            <a:off x="406301" y="870942"/>
-            <a:ext cx="8498026" cy="853083"/>
+            <a:off x="634901" y="883593"/>
+            <a:ext cx="8102798" cy="525661"/>
           </a:xfrm>
           <a:prstGeom prst="rect">
             <a:avLst/>
@@ -2930,13 +3457,31 @@
           <a:bodyPr wrap="square" lIns="0" tIns="0" rIns="0" bIns="0" rtlCol="0" anchor="t"/>
           <a:lstStyle/>
           <a:p>
+            <a:pPr algn="l" marL="342900" indent="-342900">
+              <a:lnSpc>
+                <a:spcPts val="1620"/>
+              </a:lnSpc>
+              <a:spcAft>
+                <a:spcPts val="300"/>
+              </a:spcAft>
+              <a:buSzPct val="100000"/>
+              <a:buChar char="•"/>
+            </a:pPr>
+            <a:r>
+              <a:rPr lang="en-US" sz="1200" b="1" dirty="0">
+                <a:solidFill>
+                  <a:srgbClr val="1C2833"/>
+                </a:solidFill>
+                <a:latin typeface="Arial" pitchFamily="34" charset="0"/>
+                <a:ea typeface="Arial" pitchFamily="34" charset="-122"/>
+                <a:cs typeface="Arial" pitchFamily="34" charset="-120"/>
+              </a:rPr>
+              <a:t>Tier up:</a:t>
+            </a:r>
             <a:pPr algn="l" indent="0" marL="0">
               <a:lnSpc>
-                <a:spcPts val="1680"/>
-              </a:lnSpc>
-              <a:spcBef>
-                <a:spcPts val="300"/>
-              </a:spcBef>
+                <a:spcPts val="1620"/>
+              </a:lnSpc>
               <a:spcAft>
                 <a:spcPts val="300"/>
               </a:spcAft>
@@ -2951,7 +3496,51 @@
                 <a:ea typeface="Arial" pitchFamily="34" charset="-122"/>
                 <a:cs typeface="Arial" pitchFamily="34" charset="-120"/>
               </a:rPr>
-              <a:t>– The retest moment is the most powerful one of the module. Make space for it — even quiet students will smile when they see their improvement. – Some pairs won't have a clear project plan by end of class. Pull them aside for 5 min after — better to spend the time now than have a shaky project on Day 10. – Confirm the data-project pairs have at least 5 willing test subjects lined up.</a:t>
+              <a:t> Sprint round of 20 problems in 3 minutes (full speed).</a:t>
+            </a:r>
+            <a:endParaRPr lang="en-US" sz="1200" dirty="0"/>
+          </a:p>
+          <a:p>
+            <a:pPr algn="l" marL="342900" indent="-342900">
+              <a:lnSpc>
+                <a:spcPts val="1620"/>
+              </a:lnSpc>
+              <a:spcAft>
+                <a:spcPts val="300"/>
+              </a:spcAft>
+              <a:buSzPct val="100000"/>
+              <a:buChar char="•"/>
+            </a:pPr>
+            <a:r>
+              <a:rPr lang="en-US" sz="1200" b="1" dirty="0">
+                <a:solidFill>
+                  <a:srgbClr val="1C2833"/>
+                </a:solidFill>
+                <a:latin typeface="Arial" pitchFamily="34" charset="0"/>
+                <a:ea typeface="Arial" pitchFamily="34" charset="-122"/>
+                <a:cs typeface="Arial" pitchFamily="34" charset="-120"/>
+              </a:rPr>
+              <a:t>Tier down:</a:t>
+            </a:r>
+            <a:pPr algn="l" indent="0" marL="0">
+              <a:lnSpc>
+                <a:spcPts val="1620"/>
+              </a:lnSpc>
+              <a:spcAft>
+                <a:spcPts val="300"/>
+              </a:spcAft>
+              <a:buNone/>
+            </a:pPr>
+            <a:r>
+              <a:rPr lang="en-US" sz="1200" dirty="0">
+                <a:solidFill>
+                  <a:srgbClr val="1C2833"/>
+                </a:solidFill>
+                <a:latin typeface="Arial" pitchFamily="34" charset="0"/>
+                <a:ea typeface="Arial" pitchFamily="34" charset="-122"/>
+                <a:cs typeface="Arial" pitchFamily="34" charset="-120"/>
+              </a:rPr>
+              <a:t> Sprint sheet with 5 problems in 3 minutes (slower pace, still timed).</a:t>
             </a:r>
             <a:endParaRPr lang="en-US" sz="1200" dirty="0"/>
           </a:p>
@@ -3109,7 +3698,7 @@
                 <a:ea typeface="Georgia" pitchFamily="34" charset="-122"/>
                 <a:cs typeface="Georgia" pitchFamily="34" charset="-120"/>
               </a:rPr>
-              <a:t>Citation(s) used in this lesson</a:t>
+              <a:t>Teacher notes</a:t>
             </a:r>
             <a:endParaRPr lang="en-US" sz="1800" dirty="0"/>
           </a:p>
@@ -3124,7 +3713,7 @@
         <p:spPr>
           <a:xfrm>
             <a:off x="634901" y="883593"/>
-            <a:ext cx="8102798" cy="281880"/>
+            <a:ext cx="8102798" cy="1180802"/>
           </a:xfrm>
           <a:prstGeom prst="rect">
             <a:avLst/>
@@ -3147,24 +3736,28 @@
               <a:buChar char="•"/>
             </a:pPr>
             <a:r>
-              <a:rPr lang="en-US" sz="1200" i="1" dirty="0">
-                <a:solidFill>
-                  <a:srgbClr val="1C2833"/>
-                </a:solidFill>
-                <a:latin typeface="Arial" pitchFamily="34" charset="0"/>
-                <a:ea typeface="Arial" pitchFamily="34" charset="-122"/>
-                <a:cs typeface="Arial" pitchFamily="34" charset="-120"/>
-              </a:rPr>
-              <a:t>Vedic Mathematics Batch1.pdf</a:t>
-            </a:r>
-            <a:pPr algn="l" indent="0" marL="0">
+              <a:rPr lang="en-US" sz="1200" dirty="0">
+                <a:solidFill>
+                  <a:srgbClr val="1C2833"/>
+                </a:solidFill>
+                <a:latin typeface="Arial" pitchFamily="34" charset="0"/>
+                <a:ea typeface="Arial" pitchFamily="34" charset="-122"/>
+                <a:cs typeface="Arial" pitchFamily="34" charset="-120"/>
+              </a:rPr>
+              <a:t>The retest moment is the most powerful one of the module. Make space for it — even quiet students will smile when they see their improvement.</a:t>
+            </a:r>
+            <a:endParaRPr lang="en-US" sz="1200" dirty="0"/>
+          </a:p>
+          <a:p>
+            <a:pPr algn="l" marL="342900" indent="-342900">
               <a:lnSpc>
                 <a:spcPts val="1620"/>
               </a:lnSpc>
               <a:spcAft>
                 <a:spcPts val="300"/>
               </a:spcAft>
-              <a:buNone/>
+              <a:buSzPct val="100000"/>
+              <a:buChar char="•"/>
             </a:pPr>
             <a:r>
               <a:rPr lang="en-US" sz="1200" dirty="0">
@@ -3175,7 +3768,31 @@
                 <a:ea typeface="Arial" pitchFamily="34" charset="-122"/>
                 <a:cs typeface="Arial" pitchFamily="34" charset="-120"/>
               </a:rPr>
-              <a:t> — sprint problem source.</a:t>
+              <a:t>Some pairs won't have a clear project plan by end of class. Pull them aside for 5 min after — better to spend the time now than have a shaky project on Day 10.</a:t>
+            </a:r>
+            <a:endParaRPr lang="en-US" sz="1200" dirty="0"/>
+          </a:p>
+          <a:p>
+            <a:pPr algn="l" marL="342900" indent="-342900">
+              <a:lnSpc>
+                <a:spcPts val="1620"/>
+              </a:lnSpc>
+              <a:spcAft>
+                <a:spcPts val="300"/>
+              </a:spcAft>
+              <a:buSzPct val="100000"/>
+              <a:buChar char="•"/>
+            </a:pPr>
+            <a:r>
+              <a:rPr lang="en-US" sz="1200" dirty="0">
+                <a:solidFill>
+                  <a:srgbClr val="1C2833"/>
+                </a:solidFill>
+                <a:latin typeface="Arial" pitchFamily="34" charset="0"/>
+                <a:ea typeface="Arial" pitchFamily="34" charset="-122"/>
+                <a:cs typeface="Arial" pitchFamily="34" charset="-120"/>
+              </a:rPr>
+              <a:t>Confirm the data-project pairs have at least 5 willing test subjects lined up.</a:t>
             </a:r>
             <a:endParaRPr lang="en-US" sz="1200" dirty="0"/>
           </a:p>
@@ -3189,8 +3806,8 @@
         </p:nvSpPr>
         <p:spPr>
           <a:xfrm>
-            <a:off x="406301" y="1254323"/>
-            <a:ext cx="8498026" cy="222796"/>
+            <a:off x="406301" y="4434929"/>
+            <a:ext cx="8498026" cy="213271"/>
           </a:xfrm>
           <a:prstGeom prst="rect">
             <a:avLst/>
@@ -3223,16 +3840,169 @@
                 <a:ea typeface="Arial" pitchFamily="34" charset="-122"/>
                 <a:cs typeface="Arial" pitchFamily="34" charset="-120"/>
               </a:rPr>
-              <a:t>– See </a:t>
-            </a:r>
+              <a:t>Middle ·  · IKS Curriculum</a:t>
+            </a:r>
+            <a:endParaRPr lang="en-US" sz="1200" dirty="0"/>
+          </a:p>
+        </p:txBody>
+      </p:sp>
+    </p:spTree>
+  </p:cSld>
+  <p:clrMapOvr>
+    <a:masterClrMapping/>
+  </p:clrMapOvr>
+</p:sld>
+</file>
+
+<file path=ppt/slides/slide14.xml><?xml version="1.0" encoding="utf-8"?>
+<p:sld xmlns:a="http://schemas.openxmlformats.org/drawingml/2006/main" xmlns:r="http://schemas.openxmlformats.org/officeDocument/2006/relationships" xmlns:p="http://schemas.openxmlformats.org/presentationml/2006/main">
+  <p:cSld name="Slide 14">
+    <p:bg>
+      <p:bgPr>
+        <a:solidFill>
+          <a:srgbClr val="FFFFFF"/>
+        </a:solidFill>
+      </p:bgPr>
+    </p:bg>
+    <p:spTree>
+      <p:nvGrpSpPr>
+        <p:cNvPr id="1" name=""/>
+        <p:cNvGrpSpPr/>
+        <p:nvPr/>
+      </p:nvGrpSpPr>
+      <p:grpSpPr>
+        <a:xfrm>
+          <a:off x="0" y="0"/>
+          <a:ext cx="0" cy="0"/>
+          <a:chOff x="0" y="0"/>
+          <a:chExt cx="0" cy="0"/>
+        </a:xfrm>
+      </p:grpSpPr>
+      <p:sp>
+        <p:nvSpPr>
+          <p:cNvPr id="2" name="Text 0"/>
+          <p:cNvSpPr/>
+          <p:nvPr/>
+        </p:nvSpPr>
+        <p:spPr>
+          <a:xfrm>
+            <a:off x="0" y="0"/>
+            <a:ext cx="9144000" cy="101501"/>
+          </a:xfrm>
+          <a:prstGeom prst="rect">
+            <a:avLst/>
+          </a:prstGeom>
+          <a:solidFill>
+            <a:srgbClr val="277884"/>
+          </a:solidFill>
+          <a:ln/>
+        </p:spPr>
+        <p:txBody>
+          <a:bodyPr wrap="square" rtlCol="0" anchor="ctr"/>
+          <a:lstStyle/>
+          <a:p>
+            <a:pPr indent="0" marL="0">
+              <a:buNone/>
+            </a:pPr>
+            <a:endParaRPr lang="en-US" dirty="0"/>
+          </a:p>
+        </p:txBody>
+      </p:sp>
+      <p:sp>
+        <p:nvSpPr>
+          <p:cNvPr id="3" name="Text 1"/>
+          <p:cNvSpPr/>
+          <p:nvPr/>
+        </p:nvSpPr>
+        <p:spPr>
+          <a:xfrm>
+            <a:off x="406301" y="457051"/>
+            <a:ext cx="8498026" cy="274290"/>
+          </a:xfrm>
+          <a:prstGeom prst="rect">
+            <a:avLst/>
+          </a:prstGeom>
+          <a:noFill/>
+          <a:ln/>
+        </p:spPr>
+        <p:txBody>
+          <a:bodyPr wrap="square" lIns="0" tIns="0" rIns="0" bIns="0" rtlCol="0" anchor="t"/>
+          <a:lstStyle/>
+          <a:p>
             <a:pPr algn="l" indent="0" marL="0">
               <a:lnSpc>
-                <a:spcPts val="1680"/>
+                <a:spcPts val="2160"/>
               </a:lnSpc>
               <a:spcBef>
-                <a:spcPts val="300"/>
+                <a:spcPts val="600"/>
               </a:spcBef>
               <a:spcAft>
+                <a:spcPts val="800"/>
+              </a:spcAft>
+              <a:buNone/>
+            </a:pPr>
+            <a:r>
+              <a:rPr lang="en-US" sz="1800" b="1" dirty="0">
+                <a:solidFill>
+                  <a:srgbClr val="FE4447"/>
+                </a:solidFill>
+                <a:latin typeface="Georgia" pitchFamily="34" charset="0"/>
+                <a:ea typeface="Georgia" pitchFamily="34" charset="-122"/>
+                <a:cs typeface="Georgia" pitchFamily="34" charset="-120"/>
+              </a:rPr>
+              <a:t>Citation(s) used in this lesson</a:t>
+            </a:r>
+            <a:endParaRPr lang="en-US" sz="1800" dirty="0"/>
+          </a:p>
+        </p:txBody>
+      </p:sp>
+      <p:sp>
+        <p:nvSpPr>
+          <p:cNvPr id="4" name="Text 2"/>
+          <p:cNvSpPr/>
+          <p:nvPr/>
+        </p:nvSpPr>
+        <p:spPr>
+          <a:xfrm>
+            <a:off x="634901" y="883593"/>
+            <a:ext cx="8102798" cy="544711"/>
+          </a:xfrm>
+          <a:prstGeom prst="rect">
+            <a:avLst/>
+          </a:prstGeom>
+          <a:noFill/>
+          <a:ln/>
+        </p:spPr>
+        <p:txBody>
+          <a:bodyPr wrap="square" lIns="0" tIns="0" rIns="0" bIns="0" rtlCol="0" anchor="t"/>
+          <a:lstStyle/>
+          <a:p>
+            <a:pPr algn="l" marL="342900" indent="-342900">
+              <a:lnSpc>
+                <a:spcPts val="1620"/>
+              </a:lnSpc>
+              <a:spcAft>
+                <a:spcPts val="300"/>
+              </a:spcAft>
+              <a:buSzPct val="100000"/>
+              <a:buChar char="•"/>
+            </a:pPr>
+            <a:r>
+              <a:rPr lang="en-US" sz="1200" i="1" dirty="0">
+                <a:solidFill>
+                  <a:srgbClr val="1C2833"/>
+                </a:solidFill>
+                <a:latin typeface="Arial" pitchFamily="34" charset="0"/>
+                <a:ea typeface="Arial" pitchFamily="34" charset="-122"/>
+                <a:cs typeface="Arial" pitchFamily="34" charset="-120"/>
+              </a:rPr>
+              <a:t>Vedic Mathematics Batch1.pdf</a:t>
+            </a:r>
+            <a:pPr algn="l" indent="0" marL="0">
+              <a:lnSpc>
+                <a:spcPts val="1620"/>
+              </a:lnSpc>
+              <a:spcAft>
                 <a:spcPts val="300"/>
               </a:spcAft>
               <a:buNone/>
@@ -3246,15 +4016,56 @@
                 <a:ea typeface="Arial" pitchFamily="34" charset="-122"/>
                 <a:cs typeface="Arial" pitchFamily="34" charset="-120"/>
               </a:rPr>
+              <a:t> — sprint problem source.</a:t>
+            </a:r>
+            <a:endParaRPr lang="en-US" sz="1200" dirty="0"/>
+          </a:p>
+          <a:p>
+            <a:pPr algn="l" marL="342900" indent="-342900">
+              <a:lnSpc>
+                <a:spcPts val="1620"/>
+              </a:lnSpc>
+              <a:spcAft>
+                <a:spcPts val="300"/>
+              </a:spcAft>
+              <a:buSzPct val="100000"/>
+              <a:buChar char="•"/>
+            </a:pPr>
+            <a:r>
+              <a:rPr lang="en-US" sz="1200" dirty="0">
+                <a:solidFill>
+                  <a:srgbClr val="1C2833"/>
+                </a:solidFill>
+                <a:latin typeface="Arial" pitchFamily="34" charset="0"/>
+                <a:ea typeface="Arial" pitchFamily="34" charset="-122"/>
+                <a:cs typeface="Arial" pitchFamily="34" charset="-120"/>
+              </a:rPr>
+              <a:t>See </a:t>
+            </a:r>
+            <a:pPr algn="l" indent="0" marL="0">
+              <a:lnSpc>
+                <a:spcPts val="1620"/>
+              </a:lnSpc>
+              <a:spcAft>
+                <a:spcPts val="300"/>
+              </a:spcAft>
+              <a:buNone/>
+            </a:pPr>
+            <a:r>
+              <a:rPr lang="en-US" sz="1200" dirty="0">
+                <a:solidFill>
+                  <a:srgbClr val="1C2833"/>
+                </a:solidFill>
+                <a:latin typeface="Arial" pitchFamily="34" charset="0"/>
+                <a:ea typeface="Arial" pitchFamily="34" charset="-122"/>
+                <a:cs typeface="Arial" pitchFamily="34" charset="-120"/>
+              </a:rPr>
               <a:t>assessments/project-brief.md</a:t>
             </a:r>
             <a:pPr algn="l" indent="0" marL="0">
               <a:lnSpc>
-                <a:spcPts val="1680"/>
-              </a:lnSpc>
-              <a:spcBef>
-                <a:spcPts val="300"/>
-              </a:spcBef>
+                <a:spcPts val="1620"/>
+              </a:lnSpc>
               <a:spcAft>
                 <a:spcPts val="300"/>
               </a:spcAft>
@@ -3277,7 +4088,7 @@
       </p:sp>
       <p:sp>
         <p:nvSpPr>
-          <p:cNvPr id="6" name="Text 4"/>
+          <p:cNvPr id="5" name="Text 3"/>
           <p:cNvSpPr/>
           <p:nvPr/>
         </p:nvSpPr>
@@ -3427,7 +4238,7 @@
                 <a:ea typeface="Georgia" pitchFamily="34" charset="-122"/>
                 <a:cs typeface="Georgia" pitchFamily="34" charset="-120"/>
               </a:rPr>
-              <a:t>Materials</a:t>
+              <a:t>Learning objective</a:t>
             </a:r>
             <a:endParaRPr lang="en-US" sz="1800" dirty="0"/>
           </a:p>
@@ -3475,7 +4286,7 @@
                 <a:ea typeface="Arial" pitchFamily="34" charset="-122"/>
                 <a:cs typeface="Arial" pitchFamily="34" charset="-120"/>
               </a:rPr>
-              <a:t>– Day 1 baseline sheet (per student) — they pull it from their workbook. – Sprint sheet: 10 Nikhilam-suitable problems, timer-friendly. – Project planning slip.</a:t>
+              <a:t>By the end of this lesson, students will demonstrate sub-10-second mental Nikhilam multiplication on Day 1's baseline problem (and similar) AND will have a project plan/draft ready for Day 10's showcase.</a:t>
             </a:r>
             <a:endParaRPr lang="en-US" sz="1200" dirty="0"/>
           </a:p>
@@ -3484,72 +4295,6 @@
       <p:sp>
         <p:nvSpPr>
           <p:cNvPr id="5" name="Text 3"/>
-          <p:cNvSpPr/>
-          <p:nvPr/>
-        </p:nvSpPr>
-        <p:spPr>
-          <a:xfrm>
-            <a:off x="634901" y="1386334"/>
-            <a:ext cx="8102798" cy="300930"/>
-          </a:xfrm>
-          <a:prstGeom prst="rect">
-            <a:avLst/>
-          </a:prstGeom>
-          <a:noFill/>
-          <a:ln/>
-        </p:spPr>
-        <p:txBody>
-          <a:bodyPr wrap="square" lIns="0" tIns="0" rIns="0" bIns="0" rtlCol="0" anchor="t"/>
-          <a:lstStyle/>
-          <a:p>
-            <a:pPr algn="l" marL="342900" indent="-342900">
-              <a:lnSpc>
-                <a:spcPts val="1620"/>
-              </a:lnSpc>
-              <a:spcAft>
-                <a:spcPts val="300"/>
-              </a:spcAft>
-              <a:buSzPct val="100000"/>
-              <a:buChar char="•"/>
-            </a:pPr>
-            <a:r>
-              <a:rPr lang="en-US" sz="1200" dirty="0">
-                <a:solidFill>
-                  <a:srgbClr val="1C2833"/>
-                </a:solidFill>
-                <a:latin typeface="Arial" pitchFamily="34" charset="0"/>
-                <a:ea typeface="Arial" pitchFamily="34" charset="-122"/>
-                <a:cs typeface="Arial" pitchFamily="34" charset="-120"/>
-              </a:rPr>
-              <a:t>activities/activity-02-speed-sprint.md</a:t>
-            </a:r>
-            <a:pPr algn="l" indent="0" marL="0">
-              <a:lnSpc>
-                <a:spcPts val="1620"/>
-              </a:lnSpc>
-              <a:spcAft>
-                <a:spcPts val="300"/>
-              </a:spcAft>
-              <a:buNone/>
-            </a:pPr>
-            <a:r>
-              <a:rPr lang="en-US" sz="1200" dirty="0">
-                <a:solidFill>
-                  <a:srgbClr val="1C2833"/>
-                </a:solidFill>
-                <a:latin typeface="Arial" pitchFamily="34" charset="0"/>
-                <a:ea typeface="Arial" pitchFamily="34" charset="-122"/>
-                <a:cs typeface="Arial" pitchFamily="34" charset="-120"/>
-              </a:rPr>
-              <a:t> worksheet.</a:t>
-            </a:r>
-            <a:endParaRPr lang="en-US" sz="1200" dirty="0"/>
-          </a:p>
-        </p:txBody>
-      </p:sp>
-      <p:sp>
-        <p:nvSpPr>
-          <p:cNvPr id="6" name="Text 4"/>
           <p:cNvSpPr/>
           <p:nvPr/>
         </p:nvSpPr>
@@ -3699,7 +4444,7 @@
                 <a:ea typeface="Georgia" pitchFamily="34" charset="-122"/>
                 <a:cs typeface="Georgia" pitchFamily="34" charset="-120"/>
               </a:rPr>
-              <a:t>Lesson flow</a:t>
+              <a:t>Materials</a:t>
             </a:r>
             <a:endParaRPr lang="en-US" sz="1800" dirty="0"/>
           </a:p>
@@ -3708,6 +4453,144 @@
       <p:sp>
         <p:nvSpPr>
           <p:cNvPr id="4" name="Text 2"/>
+          <p:cNvSpPr/>
+          <p:nvPr/>
+        </p:nvSpPr>
+        <p:spPr>
+          <a:xfrm>
+            <a:off x="634901" y="883593"/>
+            <a:ext cx="8102798" cy="1032272"/>
+          </a:xfrm>
+          <a:prstGeom prst="rect">
+            <a:avLst/>
+          </a:prstGeom>
+          <a:noFill/>
+          <a:ln/>
+        </p:spPr>
+        <p:txBody>
+          <a:bodyPr wrap="square" lIns="0" tIns="0" rIns="0" bIns="0" rtlCol="0" anchor="t"/>
+          <a:lstStyle/>
+          <a:p>
+            <a:pPr algn="l" marL="342900" indent="-342900">
+              <a:lnSpc>
+                <a:spcPts val="1620"/>
+              </a:lnSpc>
+              <a:spcAft>
+                <a:spcPts val="300"/>
+              </a:spcAft>
+              <a:buSzPct val="100000"/>
+              <a:buChar char="•"/>
+            </a:pPr>
+            <a:r>
+              <a:rPr lang="en-US" sz="1200" dirty="0">
+                <a:solidFill>
+                  <a:srgbClr val="1C2833"/>
+                </a:solidFill>
+                <a:latin typeface="Arial" pitchFamily="34" charset="0"/>
+                <a:ea typeface="Arial" pitchFamily="34" charset="-122"/>
+                <a:cs typeface="Arial" pitchFamily="34" charset="-120"/>
+              </a:rPr>
+              <a:t>Day 1 baseline sheet (per student) — they pull it from their workbook.</a:t>
+            </a:r>
+            <a:endParaRPr lang="en-US" sz="1200" dirty="0"/>
+          </a:p>
+          <a:p>
+            <a:pPr algn="l" marL="342900" indent="-342900">
+              <a:lnSpc>
+                <a:spcPts val="1620"/>
+              </a:lnSpc>
+              <a:spcAft>
+                <a:spcPts val="300"/>
+              </a:spcAft>
+              <a:buSzPct val="100000"/>
+              <a:buChar char="•"/>
+            </a:pPr>
+            <a:r>
+              <a:rPr lang="en-US" sz="1200" dirty="0">
+                <a:solidFill>
+                  <a:srgbClr val="1C2833"/>
+                </a:solidFill>
+                <a:latin typeface="Arial" pitchFamily="34" charset="0"/>
+                <a:ea typeface="Arial" pitchFamily="34" charset="-122"/>
+                <a:cs typeface="Arial" pitchFamily="34" charset="-120"/>
+              </a:rPr>
+              <a:t>Sprint sheet: 10 Nikhilam-suitable problems, timer-friendly.</a:t>
+            </a:r>
+            <a:endParaRPr lang="en-US" sz="1200" dirty="0"/>
+          </a:p>
+          <a:p>
+            <a:pPr algn="l" marL="342900" indent="-342900">
+              <a:lnSpc>
+                <a:spcPts val="1620"/>
+              </a:lnSpc>
+              <a:spcAft>
+                <a:spcPts val="300"/>
+              </a:spcAft>
+              <a:buSzPct val="100000"/>
+              <a:buChar char="•"/>
+            </a:pPr>
+            <a:r>
+              <a:rPr lang="en-US" sz="1200" dirty="0">
+                <a:solidFill>
+                  <a:srgbClr val="1C2833"/>
+                </a:solidFill>
+                <a:latin typeface="Arial" pitchFamily="34" charset="0"/>
+                <a:ea typeface="Arial" pitchFamily="34" charset="-122"/>
+                <a:cs typeface="Arial" pitchFamily="34" charset="-120"/>
+              </a:rPr>
+              <a:t>Project planning slip.</a:t>
+            </a:r>
+            <a:endParaRPr lang="en-US" sz="1200" dirty="0"/>
+          </a:p>
+          <a:p>
+            <a:pPr algn="l" marL="342900" indent="-342900">
+              <a:lnSpc>
+                <a:spcPts val="1620"/>
+              </a:lnSpc>
+              <a:spcAft>
+                <a:spcPts val="300"/>
+              </a:spcAft>
+              <a:buSzPct val="100000"/>
+              <a:buChar char="•"/>
+            </a:pPr>
+            <a:r>
+              <a:rPr lang="en-US" sz="1200" dirty="0">
+                <a:solidFill>
+                  <a:srgbClr val="1C2833"/>
+                </a:solidFill>
+                <a:latin typeface="Arial" pitchFamily="34" charset="0"/>
+                <a:ea typeface="Arial" pitchFamily="34" charset="-122"/>
+                <a:cs typeface="Arial" pitchFamily="34" charset="-120"/>
+              </a:rPr>
+              <a:t>activities/activity-02-speed-sprint.md</a:t>
+            </a:r>
+            <a:pPr algn="l" indent="0" marL="0">
+              <a:lnSpc>
+                <a:spcPts val="1620"/>
+              </a:lnSpc>
+              <a:spcAft>
+                <a:spcPts val="300"/>
+              </a:spcAft>
+              <a:buNone/>
+            </a:pPr>
+            <a:r>
+              <a:rPr lang="en-US" sz="1200" dirty="0">
+                <a:solidFill>
+                  <a:srgbClr val="1C2833"/>
+                </a:solidFill>
+                <a:latin typeface="Arial" pitchFamily="34" charset="0"/>
+                <a:ea typeface="Arial" pitchFamily="34" charset="-122"/>
+                <a:cs typeface="Arial" pitchFamily="34" charset="-120"/>
+              </a:rPr>
+              <a:t> worksheet.</a:t>
+            </a:r>
+            <a:endParaRPr lang="en-US" sz="1200" dirty="0"/>
+          </a:p>
+        </p:txBody>
+      </p:sp>
+      <p:sp>
+        <p:nvSpPr>
+          <p:cNvPr id="5" name="Text 3"/>
           <p:cNvSpPr/>
           <p:nvPr/>
         </p:nvSpPr>
@@ -3857,7 +4740,7 @@
                 <a:ea typeface="Georgia" pitchFamily="34" charset="-122"/>
                 <a:cs typeface="Georgia" pitchFamily="34" charset="-120"/>
               </a:rPr>
-              <a:t>Warm-up (5 min)</a:t>
+              <a:t>Lesson flow</a:t>
             </a:r>
             <a:endParaRPr lang="en-US" sz="1800" dirty="0"/>
           </a:p>
@@ -3866,100 +4749,6 @@
       <p:sp>
         <p:nvSpPr>
           <p:cNvPr id="4" name="Text 2"/>
-          <p:cNvSpPr/>
-          <p:nvPr/>
-        </p:nvSpPr>
-        <p:spPr>
-          <a:xfrm>
-            <a:off x="406301" y="870942"/>
-            <a:ext cx="8498026" cy="213271"/>
-          </a:xfrm>
-          <a:prstGeom prst="rect">
-            <a:avLst/>
-          </a:prstGeom>
-          <a:noFill/>
-          <a:ln/>
-        </p:spPr>
-        <p:txBody>
-          <a:bodyPr wrap="square" lIns="0" tIns="0" rIns="0" bIns="0" rtlCol="0" anchor="t"/>
-          <a:lstStyle/>
-          <a:p>
-            <a:pPr algn="l" indent="0" marL="0">
-              <a:lnSpc>
-                <a:spcPts val="1680"/>
-              </a:lnSpc>
-              <a:spcBef>
-                <a:spcPts val="300"/>
-              </a:spcBef>
-              <a:spcAft>
-                <a:spcPts val="300"/>
-              </a:spcAft>
-              <a:buNone/>
-            </a:pPr>
-            <a:r>
-              <a:rPr lang="en-US" sz="1200" dirty="0">
-                <a:solidFill>
-                  <a:srgbClr val="1C2833"/>
-                </a:solidFill>
-                <a:latin typeface="Arial" pitchFamily="34" charset="0"/>
-                <a:ea typeface="Arial" pitchFamily="34" charset="-122"/>
-                <a:cs typeface="Arial" pitchFamily="34" charset="-120"/>
-              </a:rPr>
-              <a:t>– Complement-to-100 + excess-from-100 mixed round.</a:t>
-            </a:r>
-            <a:endParaRPr lang="en-US" sz="1200" dirty="0"/>
-          </a:p>
-        </p:txBody>
-      </p:sp>
-      <p:sp>
-        <p:nvSpPr>
-          <p:cNvPr id="5" name="Text 3"/>
-          <p:cNvSpPr/>
-          <p:nvPr/>
-        </p:nvSpPr>
-        <p:spPr>
-          <a:xfrm>
-            <a:off x="634901" y="1173063"/>
-            <a:ext cx="8102798" cy="281880"/>
-          </a:xfrm>
-          <a:prstGeom prst="rect">
-            <a:avLst/>
-          </a:prstGeom>
-          <a:noFill/>
-          <a:ln/>
-        </p:spPr>
-        <p:txBody>
-          <a:bodyPr wrap="square" lIns="0" tIns="0" rIns="0" bIns="0" rtlCol="0" anchor="t"/>
-          <a:lstStyle/>
-          <a:p>
-            <a:pPr algn="l" marL="342900" indent="-342900">
-              <a:lnSpc>
-                <a:spcPts val="1620"/>
-              </a:lnSpc>
-              <a:spcAft>
-                <a:spcPts val="300"/>
-              </a:spcAft>
-              <a:buSzPct val="100000"/>
-              <a:buChar char="•"/>
-            </a:pPr>
-            <a:r>
-              <a:rPr lang="en-US" sz="1200" i="1" dirty="0">
-                <a:solidFill>
-                  <a:srgbClr val="1C2833"/>
-                </a:solidFill>
-                <a:latin typeface="Arial" pitchFamily="34" charset="0"/>
-                <a:ea typeface="Arial" pitchFamily="34" charset="-122"/>
-                <a:cs typeface="Arial" pitchFamily="34" charset="-120"/>
-              </a:rPr>
-              <a:t>"Today is your retest day. Get sharp."</a:t>
-            </a:r>
-            <a:endParaRPr lang="en-US" sz="1200" dirty="0"/>
-          </a:p>
-        </p:txBody>
-      </p:sp>
-      <p:sp>
-        <p:nvSpPr>
-          <p:cNvPr id="6" name="Text 4"/>
           <p:cNvSpPr/>
           <p:nvPr/>
         </p:nvSpPr>
@@ -4076,7 +4865,7 @@
         <p:spPr>
           <a:xfrm>
             <a:off x="406301" y="457051"/>
-            <a:ext cx="8498026" cy="293340"/>
+            <a:ext cx="8498026" cy="274290"/>
           </a:xfrm>
           <a:prstGeom prst="rect">
             <a:avLst/>
@@ -4101,7 +4890,7 @@
               <a:buNone/>
             </a:pPr>
             <a:r>
-              <a:rPr lang="en-US" sz="1800" dirty="0">
+              <a:rPr lang="en-US" sz="1800" b="1" dirty="0">
                 <a:solidFill>
                   <a:srgbClr val="FE4447"/>
                 </a:solidFill>
@@ -4109,30 +4898,7 @@
                 <a:ea typeface="Georgia" pitchFamily="34" charset="-122"/>
                 <a:cs typeface="Georgia" pitchFamily="34" charset="-120"/>
               </a:rPr>
-              <a:t>Speed sprint (15 min) — </a:t>
-            </a:r>
-            <a:pPr algn="l" indent="0" marL="0">
-              <a:lnSpc>
-                <a:spcPts val="2160"/>
-              </a:lnSpc>
-              <a:spcBef>
-                <a:spcPts val="600"/>
-              </a:spcBef>
-              <a:spcAft>
-                <a:spcPts val="800"/>
-              </a:spcAft>
-              <a:buNone/>
-            </a:pPr>
-            <a:r>
-              <a:rPr lang="en-US" sz="1800" b="1" dirty="0">
-                <a:solidFill>
-                  <a:srgbClr val="FE4447"/>
-                </a:solidFill>
-                <a:latin typeface="Georgia" pitchFamily="34" charset="0"/>
-                <a:ea typeface="Georgia" pitchFamily="34" charset="-122"/>
-                <a:cs typeface="Georgia" pitchFamily="34" charset="-120"/>
-              </a:rPr>
-              <a:t>activities/activity-02-speed-sprint.md</a:t>
+              <a:t>Warm-up (5 min)</a:t>
             </a:r>
             <a:endParaRPr lang="en-US" sz="1800" dirty="0"/>
           </a:p>
@@ -4146,8 +4912,8 @@
         </p:nvSpPr>
         <p:spPr>
           <a:xfrm>
-            <a:off x="406301" y="889992"/>
-            <a:ext cx="8498026" cy="639812"/>
+            <a:off x="634901" y="883593"/>
+            <a:ext cx="8102798" cy="525661"/>
           </a:xfrm>
           <a:prstGeom prst="rect">
             <a:avLst/>
@@ -4159,17 +4925,15 @@
           <a:bodyPr wrap="square" lIns="0" tIns="0" rIns="0" bIns="0" rtlCol="0" anchor="t"/>
           <a:lstStyle/>
           <a:p>
-            <a:pPr algn="l" indent="0" marL="0">
-              <a:lnSpc>
-                <a:spcPts val="1680"/>
-              </a:lnSpc>
-              <a:spcBef>
-                <a:spcPts val="300"/>
-              </a:spcBef>
-              <a:spcAft>
-                <a:spcPts val="300"/>
-              </a:spcAft>
-              <a:buNone/>
+            <a:pPr algn="l" marL="342900" indent="-342900">
+              <a:lnSpc>
+                <a:spcPts val="1620"/>
+              </a:lnSpc>
+              <a:spcAft>
+                <a:spcPts val="300"/>
+              </a:spcAft>
+              <a:buSzPct val="100000"/>
+              <a:buChar char="•"/>
             </a:pPr>
             <a:r>
               <a:rPr lang="en-US" sz="1200" dirty="0">
@@ -4180,7 +4944,31 @@
                 <a:ea typeface="Arial" pitchFamily="34" charset="-122"/>
                 <a:cs typeface="Arial" pitchFamily="34" charset="-120"/>
               </a:rPr>
-              <a:t>Brief: – 10 Nikhilam problems on a sheet, mixed (both-below, both-above, mixed-sign, near-1000). – 3 minutes individual. Solve as many as you can. – 1 minute self-correction. – Repeat (round 2): swap problems on a fresh sheet, 3 minutes again. – 1 minute self-correction. – 3-minute paired chorus round: partner reads, the other answers in chorus.</a:t>
+              <a:t>Complement-to-100 + excess-from-100 mixed round.</a:t>
+            </a:r>
+            <a:endParaRPr lang="en-US" sz="1200" dirty="0"/>
+          </a:p>
+          <a:p>
+            <a:pPr algn="l" marL="342900" indent="-342900">
+              <a:lnSpc>
+                <a:spcPts val="1620"/>
+              </a:lnSpc>
+              <a:spcAft>
+                <a:spcPts val="300"/>
+              </a:spcAft>
+              <a:buSzPct val="100000"/>
+              <a:buChar char="•"/>
+            </a:pPr>
+            <a:r>
+              <a:rPr lang="en-US" sz="1200" i="1" dirty="0">
+                <a:solidFill>
+                  <a:srgbClr val="1C2833"/>
+                </a:solidFill>
+                <a:latin typeface="Arial" pitchFamily="34" charset="0"/>
+                <a:ea typeface="Arial" pitchFamily="34" charset="-122"/>
+                <a:cs typeface="Arial" pitchFamily="34" charset="-120"/>
+              </a:rPr>
+              <a:t>"Today is your retest day. Get sharp."</a:t>
             </a:r>
             <a:endParaRPr lang="en-US" sz="1200" dirty="0"/>
           </a:p>
@@ -4305,7 +5093,7 @@
         <p:spPr>
           <a:xfrm>
             <a:off x="406301" y="457051"/>
-            <a:ext cx="8498026" cy="274290"/>
+            <a:ext cx="8498026" cy="293340"/>
           </a:xfrm>
           <a:prstGeom prst="rect">
             <a:avLst/>
@@ -4330,7 +5118,7 @@
               <a:buNone/>
             </a:pPr>
             <a:r>
-              <a:rPr lang="en-US" sz="1800" b="1" dirty="0">
+              <a:rPr lang="en-US" sz="1800" dirty="0">
                 <a:solidFill>
                   <a:srgbClr val="FE4447"/>
                 </a:solidFill>
@@ -4338,7 +5126,30 @@
                 <a:ea typeface="Georgia" pitchFamily="34" charset="-122"/>
                 <a:cs typeface="Georgia" pitchFamily="34" charset="-120"/>
               </a:rPr>
-              <a:t>Day 1 retest (5 min)</a:t>
+              <a:t>Speed sprint (15 min) — </a:t>
+            </a:r>
+            <a:pPr algn="l" indent="0" marL="0">
+              <a:lnSpc>
+                <a:spcPts val="2160"/>
+              </a:lnSpc>
+              <a:spcBef>
+                <a:spcPts val="600"/>
+              </a:spcBef>
+              <a:spcAft>
+                <a:spcPts val="800"/>
+              </a:spcAft>
+              <a:buNone/>
+            </a:pPr>
+            <a:r>
+              <a:rPr lang="en-US" sz="1800" b="1" dirty="0">
+                <a:solidFill>
+                  <a:srgbClr val="FE4447"/>
+                </a:solidFill>
+                <a:latin typeface="Georgia" pitchFamily="34" charset="0"/>
+                <a:ea typeface="Georgia" pitchFamily="34" charset="-122"/>
+                <a:cs typeface="Georgia" pitchFamily="34" charset="-120"/>
+              </a:rPr>
+              <a:t>activities/activity-02-speed-sprint.md</a:t>
             </a:r>
             <a:endParaRPr lang="en-US" sz="1800" dirty="0"/>
           </a:p>
@@ -4352,8 +5163,8 @@
         </p:nvSpPr>
         <p:spPr>
           <a:xfrm>
-            <a:off x="406301" y="870942"/>
-            <a:ext cx="8498026" cy="426541"/>
+            <a:off x="406301" y="889992"/>
+            <a:ext cx="8498026" cy="213271"/>
           </a:xfrm>
           <a:prstGeom prst="rect">
             <a:avLst/>
@@ -4386,30 +5197,7 @@
                 <a:ea typeface="Arial" pitchFamily="34" charset="-122"/>
                 <a:cs typeface="Arial" pitchFamily="34" charset="-120"/>
               </a:rPr>
-              <a:t>– Students pull their Day 1 baseline sheet (97 × 96 = 9312). – On a fresh strip, redo the problem using Nikhilam. – Record new time. – Compare: </a:t>
-            </a:r>
-            <a:pPr algn="l" indent="0" marL="0">
-              <a:lnSpc>
-                <a:spcPts val="1680"/>
-              </a:lnSpc>
-              <a:spcBef>
-                <a:spcPts val="300"/>
-              </a:spcBef>
-              <a:spcAft>
-                <a:spcPts val="300"/>
-              </a:spcAft>
-              <a:buNone/>
-            </a:pPr>
-            <a:r>
-              <a:rPr lang="en-US" sz="1200" b="1" dirty="0">
-                <a:solidFill>
-                  <a:srgbClr val="1C2833"/>
-                </a:solidFill>
-                <a:latin typeface="Arial" pitchFamily="34" charset="0"/>
-                <a:ea typeface="Arial" pitchFamily="34" charset="-122"/>
-                <a:cs typeface="Arial" pitchFamily="34" charset="-120"/>
-              </a:rPr>
-              <a:t>Day 1 (long) vs. Day 9 (Nikhilam).</a:t>
+              <a:t>Brief:</a:t>
             </a:r>
             <a:endParaRPr lang="en-US" sz="1200" dirty="0"/>
           </a:p>
@@ -4423,8 +5211,8 @@
         </p:nvSpPr>
         <p:spPr>
           <a:xfrm>
-            <a:off x="406301" y="1373684"/>
-            <a:ext cx="8498026" cy="213271"/>
+            <a:off x="634901" y="1192113"/>
+            <a:ext cx="8102798" cy="1500783"/>
           </a:xfrm>
           <a:prstGeom prst="rect">
             <a:avLst/>
@@ -4436,17 +5224,15 @@
           <a:bodyPr wrap="square" lIns="0" tIns="0" rIns="0" bIns="0" rtlCol="0" anchor="t"/>
           <a:lstStyle/>
           <a:p>
-            <a:pPr algn="l" indent="0" marL="0">
-              <a:lnSpc>
-                <a:spcPts val="1680"/>
-              </a:lnSpc>
-              <a:spcBef>
-                <a:spcPts val="300"/>
-              </a:spcBef>
-              <a:spcAft>
-                <a:spcPts val="300"/>
-              </a:spcAft>
-              <a:buNone/>
+            <a:pPr algn="l" marL="342900" indent="-342900">
+              <a:lnSpc>
+                <a:spcPts val="1620"/>
+              </a:lnSpc>
+              <a:spcAft>
+                <a:spcPts val="300"/>
+              </a:spcAft>
+              <a:buSzPct val="100000"/>
+              <a:buChar char="•"/>
             </a:pPr>
             <a:r>
               <a:rPr lang="en-US" sz="1200" dirty="0">
@@ -4457,7 +5243,127 @@
                 <a:ea typeface="Arial" pitchFamily="34" charset="-122"/>
                 <a:cs typeface="Arial" pitchFamily="34" charset="-120"/>
               </a:rPr>
-              <a:t>Most students will go from 30–60 sec → under 10 sec. Some will hit 3 sec.</a:t>
+              <a:t>10 Nikhilam problems on a sheet, mixed (both-below, both-above, mixed-sign, near-1000).</a:t>
+            </a:r>
+            <a:endParaRPr lang="en-US" sz="1200" dirty="0"/>
+          </a:p>
+          <a:p>
+            <a:pPr algn="l" marL="342900" indent="-342900">
+              <a:lnSpc>
+                <a:spcPts val="1620"/>
+              </a:lnSpc>
+              <a:spcAft>
+                <a:spcPts val="300"/>
+              </a:spcAft>
+              <a:buSzPct val="100000"/>
+              <a:buChar char="•"/>
+            </a:pPr>
+            <a:r>
+              <a:rPr lang="en-US" sz="1200" dirty="0">
+                <a:solidFill>
+                  <a:srgbClr val="1C2833"/>
+                </a:solidFill>
+                <a:latin typeface="Arial" pitchFamily="34" charset="0"/>
+                <a:ea typeface="Arial" pitchFamily="34" charset="-122"/>
+                <a:cs typeface="Arial" pitchFamily="34" charset="-120"/>
+              </a:rPr>
+              <a:t>3 minutes individual. Solve as many as you can.</a:t>
+            </a:r>
+            <a:endParaRPr lang="en-US" sz="1200" dirty="0"/>
+          </a:p>
+          <a:p>
+            <a:pPr algn="l" marL="342900" indent="-342900">
+              <a:lnSpc>
+                <a:spcPts val="1620"/>
+              </a:lnSpc>
+              <a:spcAft>
+                <a:spcPts val="300"/>
+              </a:spcAft>
+              <a:buSzPct val="100000"/>
+              <a:buChar char="•"/>
+            </a:pPr>
+            <a:r>
+              <a:rPr lang="en-US" sz="1200" dirty="0">
+                <a:solidFill>
+                  <a:srgbClr val="1C2833"/>
+                </a:solidFill>
+                <a:latin typeface="Arial" pitchFamily="34" charset="0"/>
+                <a:ea typeface="Arial" pitchFamily="34" charset="-122"/>
+                <a:cs typeface="Arial" pitchFamily="34" charset="-120"/>
+              </a:rPr>
+              <a:t>1 minute self-correction.</a:t>
+            </a:r>
+            <a:endParaRPr lang="en-US" sz="1200" dirty="0"/>
+          </a:p>
+          <a:p>
+            <a:pPr algn="l" marL="342900" indent="-342900">
+              <a:lnSpc>
+                <a:spcPts val="1620"/>
+              </a:lnSpc>
+              <a:spcAft>
+                <a:spcPts val="300"/>
+              </a:spcAft>
+              <a:buSzPct val="100000"/>
+              <a:buChar char="•"/>
+            </a:pPr>
+            <a:r>
+              <a:rPr lang="en-US" sz="1200" dirty="0">
+                <a:solidFill>
+                  <a:srgbClr val="1C2833"/>
+                </a:solidFill>
+                <a:latin typeface="Arial" pitchFamily="34" charset="0"/>
+                <a:ea typeface="Arial" pitchFamily="34" charset="-122"/>
+                <a:cs typeface="Arial" pitchFamily="34" charset="-120"/>
+              </a:rPr>
+              <a:t>Repeat (round 2): swap problems on a fresh sheet, 3 minutes again.</a:t>
+            </a:r>
+            <a:endParaRPr lang="en-US" sz="1200" dirty="0"/>
+          </a:p>
+          <a:p>
+            <a:pPr algn="l" marL="342900" indent="-342900">
+              <a:lnSpc>
+                <a:spcPts val="1620"/>
+              </a:lnSpc>
+              <a:spcAft>
+                <a:spcPts val="300"/>
+              </a:spcAft>
+              <a:buSzPct val="100000"/>
+              <a:buChar char="•"/>
+            </a:pPr>
+            <a:r>
+              <a:rPr lang="en-US" sz="1200" dirty="0">
+                <a:solidFill>
+                  <a:srgbClr val="1C2833"/>
+                </a:solidFill>
+                <a:latin typeface="Arial" pitchFamily="34" charset="0"/>
+                <a:ea typeface="Arial" pitchFamily="34" charset="-122"/>
+                <a:cs typeface="Arial" pitchFamily="34" charset="-120"/>
+              </a:rPr>
+              <a:t>1 minute self-correction.</a:t>
+            </a:r>
+            <a:endParaRPr lang="en-US" sz="1200" dirty="0"/>
+          </a:p>
+          <a:p>
+            <a:pPr algn="l" marL="342900" indent="-342900">
+              <a:lnSpc>
+                <a:spcPts val="1620"/>
+              </a:lnSpc>
+              <a:spcAft>
+                <a:spcPts val="300"/>
+              </a:spcAft>
+              <a:buSzPct val="100000"/>
+              <a:buChar char="•"/>
+            </a:pPr>
+            <a:r>
+              <a:rPr lang="en-US" sz="1200" dirty="0">
+                <a:solidFill>
+                  <a:srgbClr val="1C2833"/>
+                </a:solidFill>
+                <a:latin typeface="Arial" pitchFamily="34" charset="0"/>
+                <a:ea typeface="Arial" pitchFamily="34" charset="-122"/>
+                <a:cs typeface="Arial" pitchFamily="34" charset="-120"/>
+              </a:rPr>
+              <a:t>3-minute paired chorus round: partner reads, the other answers in chorus.</a:t>
             </a:r>
             <a:endParaRPr lang="en-US" sz="1200" dirty="0"/>
           </a:p>
@@ -4615,7 +5521,7 @@
                 <a:ea typeface="Georgia" pitchFamily="34" charset="-122"/>
                 <a:cs typeface="Georgia" pitchFamily="34" charset="-120"/>
               </a:rPr>
-              <a:t>Project planning (15 min)</a:t>
+              <a:t>Day 1 retest (5 min)</a:t>
             </a:r>
             <a:endParaRPr lang="en-US" sz="1800" dirty="0"/>
           </a:p>
@@ -4629,8 +5535,8 @@
         </p:nvSpPr>
         <p:spPr>
           <a:xfrm>
-            <a:off x="406301" y="870942"/>
-            <a:ext cx="8498026" cy="649337"/>
+            <a:off x="634901" y="883593"/>
+            <a:ext cx="8102798" cy="1013222"/>
           </a:xfrm>
           <a:prstGeom prst="rect">
             <a:avLst/>
@@ -4642,8 +5548,146 @@
           <a:bodyPr wrap="square" lIns="0" tIns="0" rIns="0" bIns="0" rtlCol="0" anchor="t"/>
           <a:lstStyle/>
           <a:p>
+            <a:pPr algn="l" marL="342900" indent="-342900">
+              <a:lnSpc>
+                <a:spcPts val="1620"/>
+              </a:lnSpc>
+              <a:spcAft>
+                <a:spcPts val="300"/>
+              </a:spcAft>
+              <a:buSzPct val="100000"/>
+              <a:buChar char="•"/>
+            </a:pPr>
+            <a:r>
+              <a:rPr lang="en-US" sz="1200" dirty="0">
+                <a:solidFill>
+                  <a:srgbClr val="1C2833"/>
+                </a:solidFill>
+                <a:latin typeface="Arial" pitchFamily="34" charset="0"/>
+                <a:ea typeface="Arial" pitchFamily="34" charset="-122"/>
+                <a:cs typeface="Arial" pitchFamily="34" charset="-120"/>
+              </a:rPr>
+              <a:t>Students pull their Day 1 baseline sheet (97 × 96 = 9312).</a:t>
+            </a:r>
+            <a:endParaRPr lang="en-US" sz="1200" dirty="0"/>
+          </a:p>
+          <a:p>
+            <a:pPr algn="l" marL="342900" indent="-342900">
+              <a:lnSpc>
+                <a:spcPts val="1620"/>
+              </a:lnSpc>
+              <a:spcAft>
+                <a:spcPts val="300"/>
+              </a:spcAft>
+              <a:buSzPct val="100000"/>
+              <a:buChar char="•"/>
+            </a:pPr>
+            <a:r>
+              <a:rPr lang="en-US" sz="1200" dirty="0">
+                <a:solidFill>
+                  <a:srgbClr val="1C2833"/>
+                </a:solidFill>
+                <a:latin typeface="Arial" pitchFamily="34" charset="0"/>
+                <a:ea typeface="Arial" pitchFamily="34" charset="-122"/>
+                <a:cs typeface="Arial" pitchFamily="34" charset="-120"/>
+              </a:rPr>
+              <a:t>On a fresh strip, redo the problem using Nikhilam.</a:t>
+            </a:r>
+            <a:endParaRPr lang="en-US" sz="1200" dirty="0"/>
+          </a:p>
+          <a:p>
+            <a:pPr algn="l" marL="342900" indent="-342900">
+              <a:lnSpc>
+                <a:spcPts val="1620"/>
+              </a:lnSpc>
+              <a:spcAft>
+                <a:spcPts val="300"/>
+              </a:spcAft>
+              <a:buSzPct val="100000"/>
+              <a:buChar char="•"/>
+            </a:pPr>
+            <a:r>
+              <a:rPr lang="en-US" sz="1200" dirty="0">
+                <a:solidFill>
+                  <a:srgbClr val="1C2833"/>
+                </a:solidFill>
+                <a:latin typeface="Arial" pitchFamily="34" charset="0"/>
+                <a:ea typeface="Arial" pitchFamily="34" charset="-122"/>
+                <a:cs typeface="Arial" pitchFamily="34" charset="-120"/>
+              </a:rPr>
+              <a:t>Record new time.</a:t>
+            </a:r>
+            <a:endParaRPr lang="en-US" sz="1200" dirty="0"/>
+          </a:p>
+          <a:p>
+            <a:pPr algn="l" marL="342900" indent="-342900">
+              <a:lnSpc>
+                <a:spcPts val="1620"/>
+              </a:lnSpc>
+              <a:spcAft>
+                <a:spcPts val="300"/>
+              </a:spcAft>
+              <a:buSzPct val="100000"/>
+              <a:buChar char="•"/>
+            </a:pPr>
+            <a:r>
+              <a:rPr lang="en-US" sz="1200" dirty="0">
+                <a:solidFill>
+                  <a:srgbClr val="1C2833"/>
+                </a:solidFill>
+                <a:latin typeface="Arial" pitchFamily="34" charset="0"/>
+                <a:ea typeface="Arial" pitchFamily="34" charset="-122"/>
+                <a:cs typeface="Arial" pitchFamily="34" charset="-120"/>
+              </a:rPr>
+              <a:t>Compare: </a:t>
+            </a:r>
             <a:pPr algn="l" indent="0" marL="0">
               <a:lnSpc>
+                <a:spcPts val="1620"/>
+              </a:lnSpc>
+              <a:spcAft>
+                <a:spcPts val="300"/>
+              </a:spcAft>
+              <a:buNone/>
+            </a:pPr>
+            <a:r>
+              <a:rPr lang="en-US" sz="1200" b="1" dirty="0">
+                <a:solidFill>
+                  <a:srgbClr val="1C2833"/>
+                </a:solidFill>
+                <a:latin typeface="Arial" pitchFamily="34" charset="0"/>
+                <a:ea typeface="Arial" pitchFamily="34" charset="-122"/>
+                <a:cs typeface="Arial" pitchFamily="34" charset="-120"/>
+              </a:rPr>
+              <a:t>Day 1 (long) vs. Day 9 (Nikhilam).</a:t>
+            </a:r>
+            <a:endParaRPr lang="en-US" sz="1200" dirty="0"/>
+          </a:p>
+        </p:txBody>
+      </p:sp>
+      <p:sp>
+        <p:nvSpPr>
+          <p:cNvPr id="5" name="Text 3"/>
+          <p:cNvSpPr/>
+          <p:nvPr/>
+        </p:nvSpPr>
+        <p:spPr>
+          <a:xfrm>
+            <a:off x="406301" y="1985665"/>
+            <a:ext cx="8498026" cy="213271"/>
+          </a:xfrm>
+          <a:prstGeom prst="rect">
+            <a:avLst/>
+          </a:prstGeom>
+          <a:noFill/>
+          <a:ln/>
+        </p:spPr>
+        <p:txBody>
+          <a:bodyPr wrap="square" lIns="0" tIns="0" rIns="0" bIns="0" rtlCol="0" anchor="t"/>
+          <a:lstStyle/>
+          <a:p>
+            <a:pPr algn="l" indent="0" marL="0">
+              <a:lnSpc>
                 <a:spcPts val="1680"/>
               </a:lnSpc>
               <a:spcBef>
@@ -4663,53 +5707,7 @@
                 <a:ea typeface="Arial" pitchFamily="34" charset="-122"/>
                 <a:cs typeface="Arial" pitchFamily="34" charset="-120"/>
               </a:rPr>
-              <a:t>– Distribute project planning slip (see </a:t>
-            </a:r>
-            <a:pPr algn="l" indent="0" marL="0">
-              <a:lnSpc>
-                <a:spcPts val="1680"/>
-              </a:lnSpc>
-              <a:spcBef>
-                <a:spcPts val="300"/>
-              </a:spcBef>
-              <a:spcAft>
-                <a:spcPts val="300"/>
-              </a:spcAft>
-              <a:buNone/>
-            </a:pPr>
-            <a:r>
-              <a:rPr lang="en-US" sz="1200" dirty="0">
-                <a:solidFill>
-                  <a:srgbClr val="1C2833"/>
-                </a:solidFill>
-                <a:latin typeface="Arial" pitchFamily="34" charset="0"/>
-                <a:ea typeface="Arial" pitchFamily="34" charset="-122"/>
-                <a:cs typeface="Arial" pitchFamily="34" charset="-120"/>
-              </a:rPr>
-              <a:t>assessments/project-brief.md</a:t>
-            </a:r>
-            <a:pPr algn="l" indent="0" marL="0">
-              <a:lnSpc>
-                <a:spcPts val="1680"/>
-              </a:lnSpc>
-              <a:spcBef>
-                <a:spcPts val="300"/>
-              </a:spcBef>
-              <a:spcAft>
-                <a:spcPts val="300"/>
-              </a:spcAft>
-              <a:buNone/>
-            </a:pPr>
-            <a:r>
-              <a:rPr lang="en-US" sz="1200" dirty="0">
-                <a:solidFill>
-                  <a:srgbClr val="1C2833"/>
-                </a:solidFill>
-                <a:latin typeface="Arial" pitchFamily="34" charset="0"/>
-                <a:ea typeface="Arial" pitchFamily="34" charset="-122"/>
-                <a:cs typeface="Arial" pitchFamily="34" charset="-120"/>
-              </a:rPr>
-              <a:t>). – Each pair fills out: – Format chosen (video / workbook / data project). – One worked example they'll feature. – Materials needed. – Who does what. – Teacher circulates, gives quick approval on viability.</a:t>
+              <a:t>Most students will go from 30–60 sec → under 10 sec. Some will hit 3 sec.</a:t>
             </a:r>
             <a:endParaRPr lang="en-US" sz="1200" dirty="0"/>
           </a:p>
@@ -4717,7 +5715,7 @@
       </p:sp>
       <p:sp>
         <p:nvSpPr>
-          <p:cNvPr id="5" name="Text 3"/>
+          <p:cNvPr id="6" name="Text 4"/>
           <p:cNvSpPr/>
           <p:nvPr/>
         </p:nvSpPr>
@@ -4867,7 +5865,7 @@
                 <a:ea typeface="Georgia" pitchFamily="34" charset="-122"/>
                 <a:cs typeface="Georgia" pitchFamily="34" charset="-120"/>
               </a:rPr>
-              <a:t>Wrap-up (5 min)</a:t>
+              <a:t>Project planning (15 min)</a:t>
             </a:r>
             <a:endParaRPr lang="en-US" sz="1800" dirty="0"/>
           </a:p>
@@ -4881,8 +5879,8 @@
         </p:nvSpPr>
         <p:spPr>
           <a:xfrm>
-            <a:off x="406301" y="870942"/>
-            <a:ext cx="8498026" cy="426541"/>
+            <a:off x="634901" y="883593"/>
+            <a:ext cx="8102798" cy="1763613"/>
           </a:xfrm>
           <a:prstGeom prst="rect">
             <a:avLst/>
@@ -4894,13 +5892,31 @@
           <a:bodyPr wrap="square" lIns="0" tIns="0" rIns="0" bIns="0" rtlCol="0" anchor="t"/>
           <a:lstStyle/>
           <a:p>
+            <a:pPr algn="l" marL="342900" indent="-342900">
+              <a:lnSpc>
+                <a:spcPts val="1620"/>
+              </a:lnSpc>
+              <a:spcAft>
+                <a:spcPts val="300"/>
+              </a:spcAft>
+              <a:buSzPct val="100000"/>
+              <a:buChar char="•"/>
+            </a:pPr>
+            <a:r>
+              <a:rPr lang="en-US" sz="1200" dirty="0">
+                <a:solidFill>
+                  <a:srgbClr val="1C2833"/>
+                </a:solidFill>
+                <a:latin typeface="Arial" pitchFamily="34" charset="0"/>
+                <a:ea typeface="Arial" pitchFamily="34" charset="-122"/>
+                <a:cs typeface="Arial" pitchFamily="34" charset="-120"/>
+              </a:rPr>
+              <a:t>Distribute project planning slip (see </a:t>
+            </a:r>
             <a:pPr algn="l" indent="0" marL="0">
               <a:lnSpc>
-                <a:spcPts val="1680"/>
-              </a:lnSpc>
-              <a:spcBef>
-                <a:spcPts val="300"/>
-              </a:spcBef>
+                <a:spcPts val="1620"/>
+              </a:lnSpc>
               <a:spcAft>
                 <a:spcPts val="300"/>
               </a:spcAft>
@@ -4915,38 +5931,12 @@
                 <a:ea typeface="Arial" pitchFamily="34" charset="-122"/>
                 <a:cs typeface="Arial" pitchFamily="34" charset="-120"/>
               </a:rPr>
-              <a:t>– Brief share-out: 3 pairs announce their plan in one sentence. – Reminder: project must demonstrate the </a:t>
+              <a:t>assessments/project-brief.md</a:t>
             </a:r>
             <a:pPr algn="l" indent="0" marL="0">
               <a:lnSpc>
-                <a:spcPts val="1680"/>
-              </a:lnSpc>
-              <a:spcBef>
-                <a:spcPts val="300"/>
-              </a:spcBef>
-              <a:spcAft>
-                <a:spcPts val="300"/>
-              </a:spcAft>
-              <a:buNone/>
-            </a:pPr>
-            <a:r>
-              <a:rPr lang="en-US" sz="1200" i="1" dirty="0">
-                <a:solidFill>
-                  <a:srgbClr val="1C2833"/>
-                </a:solidFill>
-                <a:latin typeface="Arial" pitchFamily="34" charset="0"/>
-                <a:ea typeface="Arial" pitchFamily="34" charset="-122"/>
-                <a:cs typeface="Arial" pitchFamily="34" charset="-120"/>
-              </a:rPr>
-              <a:t>Nikhilam</a:t>
-            </a:r>
-            <a:pPr algn="l" indent="0" marL="0">
-              <a:lnSpc>
-                <a:spcPts val="1680"/>
-              </a:lnSpc>
-              <a:spcBef>
-                <a:spcPts val="300"/>
-              </a:spcBef>
+                <a:spcPts val="1620"/>
+              </a:lnSpc>
               <a:spcAft>
                 <a:spcPts val="300"/>
               </a:spcAft>
@@ -4961,7 +5951,151 @@
                 <a:ea typeface="Arial" pitchFamily="34" charset="-122"/>
                 <a:cs typeface="Arial" pitchFamily="34" charset="-120"/>
               </a:rPr>
-              <a:t> method correctly; must cite at least one source PDF.</a:t>
+              <a:t>).</a:t>
+            </a:r>
+            <a:endParaRPr lang="en-US" sz="1200" dirty="0"/>
+          </a:p>
+          <a:p>
+            <a:pPr algn="l" marL="342900" indent="-342900">
+              <a:lnSpc>
+                <a:spcPts val="1620"/>
+              </a:lnSpc>
+              <a:spcAft>
+                <a:spcPts val="300"/>
+              </a:spcAft>
+              <a:buSzPct val="100000"/>
+              <a:buChar char="•"/>
+            </a:pPr>
+            <a:r>
+              <a:rPr lang="en-US" sz="1200" dirty="0">
+                <a:solidFill>
+                  <a:srgbClr val="1C2833"/>
+                </a:solidFill>
+                <a:latin typeface="Arial" pitchFamily="34" charset="0"/>
+                <a:ea typeface="Arial" pitchFamily="34" charset="-122"/>
+                <a:cs typeface="Arial" pitchFamily="34" charset="-120"/>
+              </a:rPr>
+              <a:t>Each pair fills out:</a:t>
+            </a:r>
+            <a:endParaRPr lang="en-US" sz="1200" dirty="0"/>
+          </a:p>
+          <a:p>
+            <a:pPr algn="l" marL="342900" indent="-342900">
+              <a:lnSpc>
+                <a:spcPts val="1620"/>
+              </a:lnSpc>
+              <a:spcAft>
+                <a:spcPts val="300"/>
+              </a:spcAft>
+              <a:buSzPct val="100000"/>
+              <a:buChar char="•"/>
+            </a:pPr>
+            <a:r>
+              <a:rPr lang="en-US" sz="1200" dirty="0">
+                <a:solidFill>
+                  <a:srgbClr val="1C2833"/>
+                </a:solidFill>
+                <a:latin typeface="Arial" pitchFamily="34" charset="0"/>
+                <a:ea typeface="Arial" pitchFamily="34" charset="-122"/>
+                <a:cs typeface="Arial" pitchFamily="34" charset="-120"/>
+              </a:rPr>
+              <a:t>Format chosen (video / workbook / data project).</a:t>
+            </a:r>
+            <a:endParaRPr lang="en-US" sz="1200" dirty="0"/>
+          </a:p>
+          <a:p>
+            <a:pPr algn="l" marL="342900" indent="-342900">
+              <a:lnSpc>
+                <a:spcPts val="1620"/>
+              </a:lnSpc>
+              <a:spcAft>
+                <a:spcPts val="300"/>
+              </a:spcAft>
+              <a:buSzPct val="100000"/>
+              <a:buChar char="•"/>
+            </a:pPr>
+            <a:r>
+              <a:rPr lang="en-US" sz="1200" dirty="0">
+                <a:solidFill>
+                  <a:srgbClr val="1C2833"/>
+                </a:solidFill>
+                <a:latin typeface="Arial" pitchFamily="34" charset="0"/>
+                <a:ea typeface="Arial" pitchFamily="34" charset="-122"/>
+                <a:cs typeface="Arial" pitchFamily="34" charset="-120"/>
+              </a:rPr>
+              <a:t>One worked example they'll feature.</a:t>
+            </a:r>
+            <a:endParaRPr lang="en-US" sz="1200" dirty="0"/>
+          </a:p>
+          <a:p>
+            <a:pPr algn="l" marL="342900" indent="-342900">
+              <a:lnSpc>
+                <a:spcPts val="1620"/>
+              </a:lnSpc>
+              <a:spcAft>
+                <a:spcPts val="300"/>
+              </a:spcAft>
+              <a:buSzPct val="100000"/>
+              <a:buChar char="•"/>
+            </a:pPr>
+            <a:r>
+              <a:rPr lang="en-US" sz="1200" dirty="0">
+                <a:solidFill>
+                  <a:srgbClr val="1C2833"/>
+                </a:solidFill>
+                <a:latin typeface="Arial" pitchFamily="34" charset="0"/>
+                <a:ea typeface="Arial" pitchFamily="34" charset="-122"/>
+                <a:cs typeface="Arial" pitchFamily="34" charset="-120"/>
+              </a:rPr>
+              <a:t>Materials needed.</a:t>
+            </a:r>
+            <a:endParaRPr lang="en-US" sz="1200" dirty="0"/>
+          </a:p>
+          <a:p>
+            <a:pPr algn="l" marL="342900" indent="-342900">
+              <a:lnSpc>
+                <a:spcPts val="1620"/>
+              </a:lnSpc>
+              <a:spcAft>
+                <a:spcPts val="300"/>
+              </a:spcAft>
+              <a:buSzPct val="100000"/>
+              <a:buChar char="•"/>
+            </a:pPr>
+            <a:r>
+              <a:rPr lang="en-US" sz="1200" dirty="0">
+                <a:solidFill>
+                  <a:srgbClr val="1C2833"/>
+                </a:solidFill>
+                <a:latin typeface="Arial" pitchFamily="34" charset="0"/>
+                <a:ea typeface="Arial" pitchFamily="34" charset="-122"/>
+                <a:cs typeface="Arial" pitchFamily="34" charset="-120"/>
+              </a:rPr>
+              <a:t>Who does what.</a:t>
+            </a:r>
+            <a:endParaRPr lang="en-US" sz="1200" dirty="0"/>
+          </a:p>
+          <a:p>
+            <a:pPr algn="l" marL="342900" indent="-342900">
+              <a:lnSpc>
+                <a:spcPts val="1620"/>
+              </a:lnSpc>
+              <a:spcAft>
+                <a:spcPts val="300"/>
+              </a:spcAft>
+              <a:buSzPct val="100000"/>
+              <a:buChar char="•"/>
+            </a:pPr>
+            <a:r>
+              <a:rPr lang="en-US" sz="1200" dirty="0">
+                <a:solidFill>
+                  <a:srgbClr val="1C2833"/>
+                </a:solidFill>
+                <a:latin typeface="Arial" pitchFamily="34" charset="0"/>
+                <a:ea typeface="Arial" pitchFamily="34" charset="-122"/>
+                <a:cs typeface="Arial" pitchFamily="34" charset="-120"/>
+              </a:rPr>
+              <a:t>Teacher circulates, gives quick approval on viability.</a:t>
             </a:r>
             <a:endParaRPr lang="en-US" sz="1200" dirty="0"/>
           </a:p>
@@ -5119,7 +6253,7 @@
                 <a:ea typeface="Georgia" pitchFamily="34" charset="-122"/>
                 <a:cs typeface="Georgia" pitchFamily="34" charset="-120"/>
               </a:rPr>
-              <a:t>Student-facing content</a:t>
+              <a:t>Wrap-up (5 min)</a:t>
             </a:r>
             <a:endParaRPr lang="en-US" sz="1800" dirty="0"/>
           </a:p>
@@ -5133,61 +6267,8 @@
         </p:nvSpPr>
         <p:spPr>
           <a:xfrm>
-            <a:off x="406301" y="883593"/>
-            <a:ext cx="8331398" cy="2131219"/>
-          </a:xfrm>
-          <a:prstGeom prst="rect">
-            <a:avLst/>
-          </a:prstGeom>
-          <a:solidFill>
-            <a:srgbClr val="F4F8F9"/>
-          </a:solidFill>
-          <a:ln/>
-        </p:spPr>
-        <p:txBody>
-          <a:bodyPr wrap="square" rtlCol="0" anchor="ctr"/>
-          <a:lstStyle/>
-          <a:p>
-            <a:pPr indent="0" marL="0">
-              <a:buNone/>
-            </a:pPr>
-            <a:endParaRPr lang="en-US" dirty="0"/>
-          </a:p>
-        </p:txBody>
-      </p:sp>
-      <p:sp>
-        <p:nvSpPr>
-          <p:cNvPr id="5" name="Shape 3"/>
-          <p:cNvSpPr/>
-          <p:nvPr/>
-        </p:nvSpPr>
-        <p:spPr>
-          <a:xfrm>
-            <a:off x="434876" y="883593"/>
-            <a:ext cx="0" cy="2131219"/>
-          </a:xfrm>
-          <a:prstGeom prst="line">
-            <a:avLst/>
-          </a:prstGeom>
-          <a:noFill/>
-          <a:ln w="57150">
-            <a:solidFill>
-              <a:srgbClr val="FE4447"/>
-            </a:solidFill>
-            <a:prstDash val="solid"/>
-          </a:ln>
-        </p:spPr>
-      </p:sp>
-      <p:sp>
-        <p:nvSpPr>
-          <p:cNvPr id="6" name="Text 4"/>
-          <p:cNvSpPr/>
-          <p:nvPr/>
-        </p:nvSpPr>
-        <p:spPr>
-          <a:xfrm>
-            <a:off x="692051" y="1074093"/>
-            <a:ext cx="7973389" cy="230981"/>
+            <a:off x="634901" y="883593"/>
+            <a:ext cx="8102798" cy="525661"/>
           </a:xfrm>
           <a:prstGeom prst="rect">
             <a:avLst/>
@@ -5199,364 +6280,98 @@
           <a:bodyPr wrap="square" lIns="0" tIns="0" rIns="0" bIns="0" rtlCol="0" anchor="t"/>
           <a:lstStyle/>
           <a:p>
+            <a:pPr algn="l" marL="342900" indent="-342900">
+              <a:lnSpc>
+                <a:spcPts val="1620"/>
+              </a:lnSpc>
+              <a:spcAft>
+                <a:spcPts val="300"/>
+              </a:spcAft>
+              <a:buSzPct val="100000"/>
+              <a:buChar char="•"/>
+            </a:pPr>
+            <a:r>
+              <a:rPr lang="en-US" sz="1200" dirty="0">
+                <a:solidFill>
+                  <a:srgbClr val="1C2833"/>
+                </a:solidFill>
+                <a:latin typeface="Arial" pitchFamily="34" charset="0"/>
+                <a:ea typeface="Arial" pitchFamily="34" charset="-122"/>
+                <a:cs typeface="Arial" pitchFamily="34" charset="-120"/>
+              </a:rPr>
+              <a:t>Brief share-out: 3 pairs announce their plan in one sentence.</a:t>
+            </a:r>
+            <a:endParaRPr lang="en-US" sz="1200" dirty="0"/>
+          </a:p>
+          <a:p>
+            <a:pPr algn="l" marL="342900" indent="-342900">
+              <a:lnSpc>
+                <a:spcPts val="1620"/>
+              </a:lnSpc>
+              <a:spcAft>
+                <a:spcPts val="300"/>
+              </a:spcAft>
+              <a:buSzPct val="100000"/>
+              <a:buChar char="•"/>
+            </a:pPr>
+            <a:r>
+              <a:rPr lang="en-US" sz="1200" dirty="0">
+                <a:solidFill>
+                  <a:srgbClr val="1C2833"/>
+                </a:solidFill>
+                <a:latin typeface="Arial" pitchFamily="34" charset="0"/>
+                <a:ea typeface="Arial" pitchFamily="34" charset="-122"/>
+                <a:cs typeface="Arial" pitchFamily="34" charset="-120"/>
+              </a:rPr>
+              <a:t>Reminder: project must demonstrate the </a:t>
+            </a:r>
             <a:pPr algn="l" indent="0" marL="0">
               <a:lnSpc>
-                <a:spcPts val="1820"/>
-              </a:lnSpc>
-              <a:spcBef>
-                <a:spcPts val="300"/>
-              </a:spcBef>
-              <a:spcAft>
-                <a:spcPts val="300"/>
-              </a:spcAft>
-              <a:buNone/>
-            </a:pPr>
-            <a:r>
-              <a:rPr lang="en-US" sz="1300" b="1" i="1" dirty="0">
-                <a:solidFill>
-                  <a:srgbClr val="1C2833"/>
-                </a:solidFill>
-                <a:latin typeface="Georgia" pitchFamily="34" charset="0"/>
-                <a:ea typeface="Georgia" pitchFamily="34" charset="-122"/>
-                <a:cs typeface="Georgia" pitchFamily="34" charset="-120"/>
-              </a:rPr>
-              <a:t>Day 1 retest:</a:t>
-            </a:r>
-            <a:endParaRPr lang="en-US" sz="1300" dirty="0"/>
-          </a:p>
-        </p:txBody>
-      </p:sp>
-      <p:sp>
-        <p:nvSpPr>
-          <p:cNvPr id="7" name="Text 5"/>
-          <p:cNvSpPr/>
-          <p:nvPr/>
-        </p:nvSpPr>
-        <p:spPr>
-          <a:xfrm>
-            <a:off x="692051" y="1343174"/>
-            <a:ext cx="7973389" cy="481012"/>
-          </a:xfrm>
-          <a:prstGeom prst="rect">
-            <a:avLst/>
-          </a:prstGeom>
-          <a:noFill/>
-          <a:ln/>
-        </p:spPr>
-        <p:txBody>
-          <a:bodyPr wrap="square" lIns="0" tIns="0" rIns="0" bIns="0" rtlCol="0" anchor="t"/>
-          <a:lstStyle/>
-          <a:p>
+                <a:spcPts val="1620"/>
+              </a:lnSpc>
+              <a:spcAft>
+                <a:spcPts val="300"/>
+              </a:spcAft>
+              <a:buNone/>
+            </a:pPr>
+            <a:r>
+              <a:rPr lang="en-US" sz="1200" i="1" dirty="0">
+                <a:solidFill>
+                  <a:srgbClr val="1C2833"/>
+                </a:solidFill>
+                <a:latin typeface="Arial" pitchFamily="34" charset="0"/>
+                <a:ea typeface="Arial" pitchFamily="34" charset="-122"/>
+                <a:cs typeface="Arial" pitchFamily="34" charset="-120"/>
+              </a:rPr>
+              <a:t>Nikhilam</a:t>
+            </a:r>
             <a:pPr algn="l" indent="0" marL="0">
               <a:lnSpc>
-                <a:spcPts val="1820"/>
-              </a:lnSpc>
-              <a:spcBef>
-                <a:spcPts val="300"/>
-              </a:spcBef>
-              <a:spcAft>
-                <a:spcPts val="300"/>
-              </a:spcAft>
-              <a:buNone/>
-            </a:pPr>
-            <a:r>
-              <a:rPr lang="en-US" sz="1300" dirty="0">
-                <a:solidFill>
-                  <a:srgbClr val="1C2833"/>
-                </a:solidFill>
-                <a:latin typeface="Georgia" pitchFamily="34" charset="0"/>
-                <a:ea typeface="Georgia" pitchFamily="34" charset="-122"/>
-                <a:cs typeface="Georgia" pitchFamily="34" charset="-120"/>
-              </a:rPr>
-              <a:t>My time on </a:t>
-            </a:r>
-            <a:pPr algn="l" indent="0" marL="0">
-              <a:lnSpc>
-                <a:spcPts val="1820"/>
-              </a:lnSpc>
-              <a:spcBef>
-                <a:spcPts val="300"/>
-              </a:spcBef>
-              <a:spcAft>
-                <a:spcPts val="300"/>
-              </a:spcAft>
-              <a:buNone/>
-            </a:pPr>
-            <a:r>
-              <a:rPr lang="en-US" sz="1300" i="1" dirty="0">
-                <a:solidFill>
-                  <a:srgbClr val="1C2833"/>
-                </a:solidFill>
-                <a:latin typeface="Georgia" pitchFamily="34" charset="0"/>
-                <a:ea typeface="Georgia" pitchFamily="34" charset="-122"/>
-                <a:cs typeface="Georgia" pitchFamily="34" charset="-120"/>
-              </a:rPr>
-              <a:t>97 × 96</a:t>
-            </a:r>
-            <a:pPr algn="l" indent="0" marL="0">
-              <a:lnSpc>
-                <a:spcPts val="1820"/>
-              </a:lnSpc>
-              <a:spcBef>
-                <a:spcPts val="300"/>
-              </a:spcBef>
-              <a:spcAft>
-                <a:spcPts val="300"/>
-              </a:spcAft>
-              <a:buNone/>
-            </a:pPr>
-            <a:r>
-              <a:rPr lang="en-US" sz="1300" dirty="0">
-                <a:solidFill>
-                  <a:srgbClr val="1C2833"/>
-                </a:solidFill>
-                <a:latin typeface="Georgia" pitchFamily="34" charset="0"/>
-                <a:ea typeface="Georgia" pitchFamily="34" charset="-122"/>
-                <a:cs typeface="Georgia" pitchFamily="34" charset="-120"/>
-              </a:rPr>
-              <a:t> (Day 1, long multiplication): ____ seconds My time on </a:t>
-            </a:r>
-            <a:pPr algn="l" indent="0" marL="0">
-              <a:lnSpc>
-                <a:spcPts val="1820"/>
-              </a:lnSpc>
-              <a:spcBef>
-                <a:spcPts val="300"/>
-              </a:spcBef>
-              <a:spcAft>
-                <a:spcPts val="300"/>
-              </a:spcAft>
-              <a:buNone/>
-            </a:pPr>
-            <a:r>
-              <a:rPr lang="en-US" sz="1300" i="1" dirty="0">
-                <a:solidFill>
-                  <a:srgbClr val="1C2833"/>
-                </a:solidFill>
-                <a:latin typeface="Georgia" pitchFamily="34" charset="0"/>
-                <a:ea typeface="Georgia" pitchFamily="34" charset="-122"/>
-                <a:cs typeface="Georgia" pitchFamily="34" charset="-120"/>
-              </a:rPr>
-              <a:t>97 × 96</a:t>
-            </a:r>
-            <a:pPr algn="l" indent="0" marL="0">
-              <a:lnSpc>
-                <a:spcPts val="1820"/>
-              </a:lnSpc>
-              <a:spcBef>
-                <a:spcPts val="300"/>
-              </a:spcBef>
-              <a:spcAft>
-                <a:spcPts val="300"/>
-              </a:spcAft>
-              <a:buNone/>
-            </a:pPr>
-            <a:r>
-              <a:rPr lang="en-US" sz="1300" dirty="0">
-                <a:solidFill>
-                  <a:srgbClr val="1C2833"/>
-                </a:solidFill>
-                <a:latin typeface="Georgia" pitchFamily="34" charset="0"/>
-                <a:ea typeface="Georgia" pitchFamily="34" charset="-122"/>
-                <a:cs typeface="Georgia" pitchFamily="34" charset="-120"/>
-              </a:rPr>
-              <a:t> (Day 9, Nikhilam): ____ seconds </a:t>
-            </a:r>
-            <a:pPr algn="l" indent="0" marL="0">
-              <a:lnSpc>
-                <a:spcPts val="1820"/>
-              </a:lnSpc>
-              <a:spcBef>
-                <a:spcPts val="300"/>
-              </a:spcBef>
-              <a:spcAft>
-                <a:spcPts val="300"/>
-              </a:spcAft>
-              <a:buNone/>
-            </a:pPr>
-            <a:r>
-              <a:rPr lang="en-US" sz="1300" b="1" i="1" dirty="0">
-                <a:solidFill>
-                  <a:srgbClr val="1C2833"/>
-                </a:solidFill>
-                <a:latin typeface="Georgia" pitchFamily="34" charset="0"/>
-                <a:ea typeface="Georgia" pitchFamily="34" charset="-122"/>
-                <a:cs typeface="Georgia" pitchFamily="34" charset="-120"/>
-              </a:rPr>
-              <a:t>My speedup:</a:t>
-            </a:r>
-            <a:pPr algn="l" indent="0" marL="0">
-              <a:lnSpc>
-                <a:spcPts val="1820"/>
-              </a:lnSpc>
-              <a:spcBef>
-                <a:spcPts val="300"/>
-              </a:spcBef>
-              <a:spcAft>
-                <a:spcPts val="300"/>
-              </a:spcAft>
-              <a:buNone/>
-            </a:pPr>
-            <a:r>
-              <a:rPr lang="en-US" sz="1300" dirty="0">
-                <a:solidFill>
-                  <a:srgbClr val="1C2833"/>
-                </a:solidFill>
-                <a:latin typeface="Georgia" pitchFamily="34" charset="0"/>
-                <a:ea typeface="Georgia" pitchFamily="34" charset="-122"/>
-                <a:cs typeface="Georgia" pitchFamily="34" charset="-120"/>
-              </a:rPr>
-              <a:t> ____×</a:t>
-            </a:r>
-            <a:endParaRPr lang="en-US" sz="1300" dirty="0"/>
-          </a:p>
-        </p:txBody>
-      </p:sp>
-      <p:sp>
-        <p:nvSpPr>
-          <p:cNvPr id="8" name="Text 6"/>
-          <p:cNvSpPr/>
-          <p:nvPr/>
-        </p:nvSpPr>
-        <p:spPr>
-          <a:xfrm>
-            <a:off x="692051" y="1862286"/>
-            <a:ext cx="7973389" cy="461963"/>
-          </a:xfrm>
-          <a:prstGeom prst="rect">
-            <a:avLst/>
-          </a:prstGeom>
-          <a:noFill/>
-          <a:ln/>
-        </p:spPr>
-        <p:txBody>
-          <a:bodyPr wrap="square" lIns="0" tIns="0" rIns="0" bIns="0" rtlCol="0" anchor="t"/>
-          <a:lstStyle/>
-          <a:p>
-            <a:pPr algn="l" indent="0" marL="0">
-              <a:lnSpc>
-                <a:spcPts val="1820"/>
-              </a:lnSpc>
-              <a:spcBef>
-                <a:spcPts val="300"/>
-              </a:spcBef>
-              <a:spcAft>
-                <a:spcPts val="300"/>
-              </a:spcAft>
-              <a:buNone/>
-            </a:pPr>
-            <a:r>
-              <a:rPr lang="en-US" sz="1300" b="1" i="1" dirty="0">
-                <a:solidFill>
-                  <a:srgbClr val="1C2833"/>
-                </a:solidFill>
-                <a:latin typeface="Georgia" pitchFamily="34" charset="0"/>
-                <a:ea typeface="Georgia" pitchFamily="34" charset="-122"/>
-                <a:cs typeface="Georgia" pitchFamily="34" charset="-120"/>
-              </a:rPr>
-              <a:t>Sprint scoring:</a:t>
-            </a:r>
-            <a:pPr algn="l" indent="0" marL="0">
-              <a:lnSpc>
-                <a:spcPts val="1820"/>
-              </a:lnSpc>
-              <a:spcBef>
-                <a:spcPts val="300"/>
-              </a:spcBef>
-              <a:spcAft>
-                <a:spcPts val="300"/>
-              </a:spcAft>
-              <a:buNone/>
-            </a:pPr>
-            <a:r>
-              <a:rPr lang="en-US" sz="1300" dirty="0">
-                <a:solidFill>
-                  <a:srgbClr val="1C2833"/>
-                </a:solidFill>
-                <a:latin typeface="Georgia" pitchFamily="34" charset="0"/>
-                <a:ea typeface="Georgia" pitchFamily="34" charset="-122"/>
-                <a:cs typeface="Georgia" pitchFamily="34" charset="-120"/>
-              </a:rPr>
-              <a:t> 10 problems in 3 minutes. Each correct = 1 point. Each wrong with right method = 0.5 (you knew the method). Each wrong with wrong method choice = 0.</a:t>
-            </a:r>
-            <a:endParaRPr lang="en-US" sz="1300" dirty="0"/>
-          </a:p>
-        </p:txBody>
-      </p:sp>
-      <p:sp>
-        <p:nvSpPr>
-          <p:cNvPr id="9" name="Text 7"/>
-          <p:cNvSpPr/>
-          <p:nvPr/>
-        </p:nvSpPr>
-        <p:spPr>
-          <a:xfrm>
-            <a:off x="692051" y="2362349"/>
-            <a:ext cx="7973389" cy="461963"/>
-          </a:xfrm>
-          <a:prstGeom prst="rect">
-            <a:avLst/>
-          </a:prstGeom>
-          <a:noFill/>
-          <a:ln/>
-        </p:spPr>
-        <p:txBody>
-          <a:bodyPr wrap="square" lIns="0" tIns="0" rIns="0" bIns="0" rtlCol="0" anchor="t"/>
-          <a:lstStyle/>
-          <a:p>
-            <a:pPr algn="l" indent="0" marL="0">
-              <a:lnSpc>
-                <a:spcPts val="1820"/>
-              </a:lnSpc>
-              <a:spcBef>
-                <a:spcPts val="300"/>
-              </a:spcBef>
-              <a:spcAft>
-                <a:spcPts val="300"/>
-              </a:spcAft>
-              <a:buNone/>
-            </a:pPr>
-            <a:r>
-              <a:rPr lang="en-US" sz="1300" b="1" i="1" dirty="0">
-                <a:solidFill>
-                  <a:srgbClr val="1C2833"/>
-                </a:solidFill>
-                <a:latin typeface="Georgia" pitchFamily="34" charset="0"/>
-                <a:ea typeface="Georgia" pitchFamily="34" charset="-122"/>
-                <a:cs typeface="Georgia" pitchFamily="34" charset="-120"/>
-              </a:rPr>
-              <a:t>Project plan (fill in):</a:t>
-            </a:r>
-            <a:pPr algn="l" indent="0" marL="0">
-              <a:lnSpc>
-                <a:spcPts val="1820"/>
-              </a:lnSpc>
-              <a:spcBef>
-                <a:spcPts val="300"/>
-              </a:spcBef>
-              <a:spcAft>
-                <a:spcPts val="300"/>
-              </a:spcAft>
-              <a:buNone/>
-            </a:pPr>
-            <a:r>
-              <a:rPr lang="en-US" sz="1300" dirty="0">
-                <a:solidFill>
-                  <a:srgbClr val="1C2833"/>
-                </a:solidFill>
-                <a:latin typeface="Georgia" pitchFamily="34" charset="0"/>
-                <a:ea typeface="Georgia" pitchFamily="34" charset="-122"/>
-                <a:cs typeface="Georgia" pitchFamily="34" charset="-120"/>
-              </a:rPr>
-              <a:t> - Format: ______________ - Featured example: ____________ - Materials: ________________ - Partner / role split: ______________</a:t>
-            </a:r>
-            <a:endParaRPr lang="en-US" sz="1300" dirty="0"/>
-          </a:p>
-        </p:txBody>
-      </p:sp>
-      <p:sp>
-        <p:nvSpPr>
-          <p:cNvPr id="10" name="Text 8"/>
+                <a:spcPts val="1620"/>
+              </a:lnSpc>
+              <a:spcAft>
+                <a:spcPts val="300"/>
+              </a:spcAft>
+              <a:buNone/>
+            </a:pPr>
+            <a:r>
+              <a:rPr lang="en-US" sz="1200" dirty="0">
+                <a:solidFill>
+                  <a:srgbClr val="1C2833"/>
+                </a:solidFill>
+                <a:latin typeface="Arial" pitchFamily="34" charset="0"/>
+                <a:ea typeface="Arial" pitchFamily="34" charset="-122"/>
+                <a:cs typeface="Arial" pitchFamily="34" charset="-120"/>
+              </a:rPr>
+              <a:t> method correctly; must cite at least one source PDF.</a:t>
+            </a:r>
+            <a:endParaRPr lang="en-US" sz="1200" dirty="0"/>
+          </a:p>
+        </p:txBody>
+      </p:sp>
+      <p:sp>
+        <p:nvSpPr>
+          <p:cNvPr id="5" name="Text 3"/>
           <p:cNvSpPr/>
           <p:nvPr/>
         </p:nvSpPr>
